--- a/assets/powerpoints/module-n7-emploi/C4-ce-que-la-loi-dit-vraiment.pptx
+++ b/assets/powerpoints/module-n7-emploi/C4-ce-que-la-loi-dit-vraiment.pptx
@@ -16,6 +16,8 @@
     <p:sldId id="264" r:id="rId16"/>
     <p:sldId id="265" r:id="rId17"/>
     <p:sldId id="266" r:id="rId18"/>
+    <p:sldId id="267" r:id="rId19"/>
+    <p:sldId id="268" r:id="rId20"/>
   </p:sldIdLst>
   <p:sldSz cx="12191695" cy="6858000" type="screen4x3"/>
   <p:notesSz cx="6858000" cy="9144000"/>
@@ -582,7 +584,7 @@
           <a:lstStyle/>
           <a:p>
             <a:r>
-              <a:t>Faire donner un exemple de chaque par le groupe. Les congés supplémentaires d'une convention sont une politique ; le droit de refus est une loi.</a:t>
+              <a:t>Ouvrir l'exercice `t2cnesst` du module en parallèle : c'est un texte suivi avec passages cliquables, et les élèves y retrouvent les phrases exactes de la loi.</a:t>
             </a:r>
           </a:p>
         </p:txBody>
@@ -652,6 +654,146 @@
           <a:lstStyle/>
           <a:p>
             <a:r>
+              <a:t>Corriger en groupe. Donner la bonne réponse, sans revenir sur qui s'est trompé.</a:t>
+            </a:r>
+          </a:p>
+        </p:txBody>
+      </p:sp>
+      <p:sp>
+        <p:nvSpPr>
+          <p:cNvPr id="4" name="Slide Number Placeholder 3"/>
+          <p:cNvSpPr>
+            <a:spLocks noGrp="1"/>
+          </p:cNvSpPr>
+          <p:nvPr>
+            <p:ph type="sldNum" idx="5" sz="quarter"/>
+          </p:nvPr>
+        </p:nvSpPr>
+        <p:spPr/>
+      </p:sp>
+    </p:spTree>
+  </p:cSld>
+  <p:clrMapOvr>
+    <a:masterClrMapping/>
+  </p:clrMapOvr>
+</p:notes>
+</file>
+
+<file path=ppt/notesSlides/notesSlide12.xml><?xml version="1.0" encoding="utf-8"?>
+<p:notes xmlns:a="http://schemas.openxmlformats.org/drawingml/2006/main" xmlns:p="http://schemas.openxmlformats.org/presentationml/2006/main" xmlns:r="http://schemas.openxmlformats.org/officeDocument/2006/relationships">
+  <p:cSld>
+    <p:spTree>
+      <p:nvGrpSpPr>
+        <p:cNvPr id="1" name=""/>
+        <p:cNvGrpSpPr/>
+        <p:nvPr/>
+      </p:nvGrpSpPr>
+      <p:grpSpPr>
+        <a:xfrm>
+          <a:off x="0" y="0"/>
+          <a:ext cx="0" cy="0"/>
+          <a:chOff x="0" y="0"/>
+          <a:chExt cx="0" cy="0"/>
+        </a:xfrm>
+      </p:grpSpPr>
+      <p:sp>
+        <p:nvSpPr>
+          <p:cNvPr id="2" name="Slide Image Placeholder 1"/>
+          <p:cNvSpPr>
+            <a:spLocks noGrp="1"/>
+          </p:cNvSpPr>
+          <p:nvPr>
+            <p:ph type="sldImg" idx="2"/>
+          </p:nvPr>
+        </p:nvSpPr>
+        <p:spPr/>
+      </p:sp>
+      <p:sp>
+        <p:nvSpPr>
+          <p:cNvPr id="3" name="Notes Placeholder 2"/>
+          <p:cNvSpPr>
+            <a:spLocks noGrp="1"/>
+          </p:cNvSpPr>
+          <p:nvPr>
+            <p:ph type="body" idx="3" sz="quarter"/>
+          </p:nvPr>
+        </p:nvSpPr>
+        <p:spPr/>
+        <p:txBody>
+          <a:bodyPr/>
+          <a:lstStyle/>
+          <a:p>
+            <a:r>
+              <a:t>Faire donner un exemple de chaque par le groupe. Les congés supplémentaires d'une convention sont une politique ; le droit de refus est une loi.</a:t>
+            </a:r>
+          </a:p>
+        </p:txBody>
+      </p:sp>
+      <p:sp>
+        <p:nvSpPr>
+          <p:cNvPr id="4" name="Slide Number Placeholder 3"/>
+          <p:cNvSpPr>
+            <a:spLocks noGrp="1"/>
+          </p:cNvSpPr>
+          <p:nvPr>
+            <p:ph type="sldNum" idx="5" sz="quarter"/>
+          </p:nvPr>
+        </p:nvSpPr>
+        <p:spPr/>
+      </p:sp>
+    </p:spTree>
+  </p:cSld>
+  <p:clrMapOvr>
+    <a:masterClrMapping/>
+  </p:clrMapOvr>
+</p:notes>
+</file>
+
+<file path=ppt/notesSlides/notesSlide13.xml><?xml version="1.0" encoding="utf-8"?>
+<p:notes xmlns:a="http://schemas.openxmlformats.org/drawingml/2006/main" xmlns:p="http://schemas.openxmlformats.org/presentationml/2006/main" xmlns:r="http://schemas.openxmlformats.org/officeDocument/2006/relationships">
+  <p:cSld>
+    <p:spTree>
+      <p:nvGrpSpPr>
+        <p:cNvPr id="1" name=""/>
+        <p:cNvGrpSpPr/>
+        <p:nvPr/>
+      </p:nvGrpSpPr>
+      <p:grpSpPr>
+        <a:xfrm>
+          <a:off x="0" y="0"/>
+          <a:ext cx="0" cy="0"/>
+          <a:chOff x="0" y="0"/>
+          <a:chExt cx="0" cy="0"/>
+        </a:xfrm>
+      </p:grpSpPr>
+      <p:sp>
+        <p:nvSpPr>
+          <p:cNvPr id="2" name="Slide Image Placeholder 1"/>
+          <p:cNvSpPr>
+            <a:spLocks noGrp="1"/>
+          </p:cNvSpPr>
+          <p:nvPr>
+            <p:ph type="sldImg" idx="2"/>
+          </p:nvPr>
+        </p:nvSpPr>
+        <p:spPr/>
+      </p:sp>
+      <p:sp>
+        <p:nvSpPr>
+          <p:cNvPr id="3" name="Notes Placeholder 2"/>
+          <p:cNvSpPr>
+            <a:spLocks noGrp="1"/>
+          </p:cNvSpPr>
+          <p:nvPr>
+            <p:ph type="body" idx="3" sz="quarter"/>
+          </p:nvPr>
+        </p:nvSpPr>
+        <p:spPr/>
+        <p:txBody>
+          <a:bodyPr/>
+          <a:lstStyle/>
+          <a:p>
+            <a:r>
               <a:t>Devoir réel, à faire hors de la classe. Prévoir cinq minutes au début de la séance D1 pour les réponses : elles sont souvent surprenantes, y compris pour les élèves qui travaillent depuis des années au même endroit.</a:t>
             </a:r>
           </a:p>
@@ -1142,7 +1284,7 @@
           <a:lstStyle/>
           <a:p>
             <a:r>
-              <a:t>Ouvrir l'exercice `t2cnesst` du module en parallèle : c'est un texte suivi avec passages cliquables, et les élèves y retrouvent les phrases exactes de la loi.</a:t>
+              <a:t>Le texte même de l'exercice `t2cnesst`. Les articles 12 et 13 sont cités au mot près : c'est le seul endroit du module où l'on ne reformule pas. Faire remarquer le changement de voix entre 3.4 et l'article 12.</a:t>
             </a:r>
           </a:p>
         </p:txBody>
@@ -1212,7 +1354,7 @@
           <a:lstStyle/>
           <a:p>
             <a:r>
-              <a:t>Corriger en groupe. Donner la bonne réponse, sans revenir sur qui s'est trompé.</a:t>
+              <a:t>Suite du document. Laisser le temps de le lire en entier avant de poser la première question.</a:t>
             </a:r>
           </a:p>
         </p:txBody>
@@ -4673,67 +4815,21 @@
                 </a:solidFill>
                 <a:latin typeface="Verdana"/>
               </a:rPr>
-              <a:t>Le piège le plus fréquent</a:t>
-            </a:r>
-          </a:p>
-        </p:txBody>
-      </p:sp>
-      <p:sp>
-        <p:nvSpPr>
-          <p:cNvPr id="7" name="Rounded Rectangle 6"/>
-          <p:cNvSpPr/>
-          <p:nvPr/>
-        </p:nvSpPr>
-        <p:spPr>
-          <a:xfrm>
-            <a:off x="566928" y="1856232"/>
-            <a:ext cx="5428335" cy="2331720"/>
-          </a:xfrm>
-          <a:prstGeom prst="roundRect">
-            <a:avLst>
-              <a:gd name="adj" fmla="val 6274"/>
-            </a:avLst>
-          </a:prstGeom>
-          <a:solidFill>
-            <a:srgbClr val="FFF6F5"/>
-          </a:solidFill>
-          <a:ln w="12700">
-            <a:solidFill>
-              <a:srgbClr val="DC2626"/>
-            </a:solidFill>
-          </a:ln>
-          <a:effectLst/>
-        </p:spPr>
-        <p:style>
-          <a:lnRef idx="1">
-            <a:schemeClr val="accent1"/>
-          </a:lnRef>
-          <a:fillRef idx="3">
-            <a:schemeClr val="accent1"/>
-          </a:fillRef>
-          <a:effectRef idx="2">
-            <a:schemeClr val="accent1"/>
-          </a:effectRef>
-          <a:fontRef idx="minor">
-            <a:schemeClr val="lt1"/>
-          </a:fontRef>
-        </p:style>
-        <p:txBody>
-          <a:bodyPr rtlCol="0" anchor="ctr"/>
-          <a:lstStyle/>
-          <a:p/>
-        </p:txBody>
-      </p:sp>
-      <p:sp>
-        <p:nvSpPr>
-          <p:cNvPr id="8" name="TextBox 7"/>
+              <a:t>Six questions sur le document</a:t>
+            </a:r>
+          </a:p>
+        </p:txBody>
+      </p:sp>
+      <p:sp>
+        <p:nvSpPr>
+          <p:cNvPr id="7" name="TextBox 6"/>
           <p:cNvSpPr txBox="1"/>
           <p:nvPr/>
         </p:nvSpPr>
         <p:spPr>
           <a:xfrm>
-            <a:off x="932688" y="2130552"/>
-            <a:ext cx="4696815" cy="274320"/>
+            <a:off x="566928" y="1645920"/>
+            <a:ext cx="11057839" cy="329184"/>
           </a:xfrm>
           <a:prstGeom prst="rect">
             <a:avLst/>
@@ -4752,194 +4848,31 @@
               </a:lnSpc>
             </a:pPr>
             <a:r>
-              <a:rPr sz="1300" b="1" i="0" spc="156">
-                <a:solidFill>
-                  <a:srgbClr val="B91C1C"/>
-                </a:solidFill>
-                <a:latin typeface="Verdana"/>
-              </a:rPr>
-              <a:t>ON ENTEND SOUVENT</a:t>
-            </a:r>
-          </a:p>
-        </p:txBody>
-      </p:sp>
-      <p:sp>
-        <p:nvSpPr>
-          <p:cNvPr id="9" name="TextBox 8"/>
-          <p:cNvSpPr txBox="1"/>
-          <p:nvPr/>
-        </p:nvSpPr>
-        <p:spPr>
-          <a:xfrm>
-            <a:off x="932688" y="2569464"/>
-            <a:ext cx="4696815" cy="1417320"/>
-          </a:xfrm>
-          <a:prstGeom prst="rect">
-            <a:avLst/>
-          </a:prstGeom>
-          <a:noFill/>
-        </p:spPr>
-        <p:txBody>
-          <a:bodyPr wrap="square" lIns="0" rIns="0" tIns="0" bIns="0" anchor="t">
-            <a:spAutoFit/>
-          </a:bodyPr>
-          <a:lstStyle/>
-          <a:p>
-            <a:pPr algn="l">
-              <a:lnSpc>
-                <a:spcPct val="130000"/>
-              </a:lnSpc>
-            </a:pPr>
-            <a:r>
-              <a:rPr sz="2500" b="1" i="0">
-                <a:solidFill>
-                  <a:srgbClr val="17181A"/>
-                </a:solidFill>
-                <a:latin typeface="Verdana"/>
-              </a:rPr>
-              <a:t>croire qu'une politique d'employeur est une loi</a:t>
-            </a:r>
-          </a:p>
-        </p:txBody>
-      </p:sp>
-      <p:sp>
-        <p:nvSpPr>
-          <p:cNvPr id="10" name="Rounded Rectangle 9"/>
+              <a:rPr sz="1800" b="0" i="0">
+                <a:solidFill>
+                  <a:srgbClr val="6E7175"/>
+                </a:solidFill>
+                <a:latin typeface="Verdana"/>
+              </a:rPr>
+              <a:t>Répondez d'après le document et les articles ci-dessus.</a:t>
+            </a:r>
+          </a:p>
+        </p:txBody>
+      </p:sp>
+      <p:sp>
+        <p:nvSpPr>
+          <p:cNvPr id="8" name="Rounded Rectangle 7"/>
           <p:cNvSpPr/>
           <p:nvPr/>
         </p:nvSpPr>
         <p:spPr>
           <a:xfrm>
-            <a:off x="6196431" y="1856232"/>
-            <a:ext cx="5428335" cy="2331720"/>
+            <a:off x="566928" y="2139696"/>
+            <a:ext cx="11057839" cy="559816"/>
           </a:xfrm>
           <a:prstGeom prst="roundRect">
             <a:avLst>
-              <a:gd name="adj" fmla="val 6274"/>
-            </a:avLst>
-          </a:prstGeom>
-          <a:solidFill>
-            <a:srgbClr val="E6F5EE"/>
-          </a:solidFill>
-          <a:ln w="12700">
-            <a:solidFill>
-              <a:srgbClr val="0A8F5B"/>
-            </a:solidFill>
-          </a:ln>
-          <a:effectLst/>
-        </p:spPr>
-        <p:style>
-          <a:lnRef idx="1">
-            <a:schemeClr val="accent1"/>
-          </a:lnRef>
-          <a:fillRef idx="3">
-            <a:schemeClr val="accent1"/>
-          </a:fillRef>
-          <a:effectRef idx="2">
-            <a:schemeClr val="accent1"/>
-          </a:effectRef>
-          <a:fontRef idx="minor">
-            <a:schemeClr val="lt1"/>
-          </a:fontRef>
-        </p:style>
-        <p:txBody>
-          <a:bodyPr rtlCol="0" anchor="ctr"/>
-          <a:lstStyle/>
-          <a:p/>
-        </p:txBody>
-      </p:sp>
-      <p:sp>
-        <p:nvSpPr>
-          <p:cNvPr id="11" name="TextBox 10"/>
-          <p:cNvSpPr txBox="1"/>
-          <p:nvPr/>
-        </p:nvSpPr>
-        <p:spPr>
-          <a:xfrm>
-            <a:off x="6562191" y="2130552"/>
-            <a:ext cx="4696815" cy="274320"/>
-          </a:xfrm>
-          <a:prstGeom prst="rect">
-            <a:avLst/>
-          </a:prstGeom>
-          <a:noFill/>
-        </p:spPr>
-        <p:txBody>
-          <a:bodyPr wrap="square" lIns="0" rIns="0" tIns="0" bIns="0" anchor="t">
-            <a:spAutoFit/>
-          </a:bodyPr>
-          <a:lstStyle/>
-          <a:p>
-            <a:pPr algn="l">
-              <a:lnSpc>
-                <a:spcPct val="135000"/>
-              </a:lnSpc>
-            </a:pPr>
-            <a:r>
-              <a:rPr sz="1300" b="1" i="0" spc="156">
-                <a:solidFill>
-                  <a:srgbClr val="07734A"/>
-                </a:solidFill>
-                <a:latin typeface="Verdana"/>
-              </a:rPr>
-              <a:t>IL FAUT DIRE PLUTÔT</a:t>
-            </a:r>
-          </a:p>
-        </p:txBody>
-      </p:sp>
-      <p:sp>
-        <p:nvSpPr>
-          <p:cNvPr id="12" name="TextBox 11"/>
-          <p:cNvSpPr txBox="1"/>
-          <p:nvPr/>
-        </p:nvSpPr>
-        <p:spPr>
-          <a:xfrm>
-            <a:off x="6562191" y="2569464"/>
-            <a:ext cx="4696815" cy="1417320"/>
-          </a:xfrm>
-          <a:prstGeom prst="rect">
-            <a:avLst/>
-          </a:prstGeom>
-          <a:noFill/>
-        </p:spPr>
-        <p:txBody>
-          <a:bodyPr wrap="square" lIns="0" rIns="0" tIns="0" bIns="0" anchor="t">
-            <a:spAutoFit/>
-          </a:bodyPr>
-          <a:lstStyle/>
-          <a:p>
-            <a:pPr algn="l">
-              <a:lnSpc>
-                <a:spcPct val="130000"/>
-              </a:lnSpc>
-            </a:pPr>
-            <a:r>
-              <a:rPr sz="2500" b="1" i="0">
-                <a:solidFill>
-                  <a:srgbClr val="17181A"/>
-                </a:solidFill>
-                <a:latin typeface="Verdana"/>
-              </a:rPr>
-              <a:t>demander où c'est écrit</a:t>
-            </a:r>
-          </a:p>
-        </p:txBody>
-      </p:sp>
-      <p:sp>
-        <p:nvSpPr>
-          <p:cNvPr id="13" name="Rounded Rectangle 12"/>
-          <p:cNvSpPr/>
-          <p:nvPr/>
-        </p:nvSpPr>
-        <p:spPr>
-          <a:xfrm>
-            <a:off x="566928" y="4462272"/>
-            <a:ext cx="11057839" cy="1618487"/>
-          </a:xfrm>
-          <a:prstGeom prst="roundRect">
-            <a:avLst>
-              <a:gd name="adj" fmla="val 9039"/>
+              <a:gd name="adj" fmla="val 26134"/>
             </a:avLst>
           </a:prstGeom>
           <a:solidFill>
@@ -4974,14 +4907,58 @@
       </p:sp>
       <p:sp>
         <p:nvSpPr>
-          <p:cNvPr id="14" name="TextBox 13"/>
+          <p:cNvPr id="9" name="Rounded Rectangle 8"/>
+          <p:cNvSpPr/>
+          <p:nvPr/>
+        </p:nvSpPr>
+        <p:spPr>
+          <a:xfrm>
+            <a:off x="841247" y="2236724"/>
+            <a:ext cx="365760" cy="365760"/>
+          </a:xfrm>
+          <a:prstGeom prst="roundRect">
+            <a:avLst>
+              <a:gd name="adj" fmla="val 32500"/>
+            </a:avLst>
+          </a:prstGeom>
+          <a:solidFill>
+            <a:srgbClr val="E7F0F6"/>
+          </a:solidFill>
+          <a:ln>
+            <a:noFill/>
+          </a:ln>
+          <a:effectLst/>
+        </p:spPr>
+        <p:style>
+          <a:lnRef idx="1">
+            <a:schemeClr val="accent1"/>
+          </a:lnRef>
+          <a:fillRef idx="3">
+            <a:schemeClr val="accent1"/>
+          </a:fillRef>
+          <a:effectRef idx="2">
+            <a:schemeClr val="accent1"/>
+          </a:effectRef>
+          <a:fontRef idx="minor">
+            <a:schemeClr val="lt1"/>
+          </a:fontRef>
+        </p:style>
+        <p:txBody>
+          <a:bodyPr rtlCol="0" anchor="ctr"/>
+          <a:lstStyle/>
+          <a:p/>
+        </p:txBody>
+      </p:sp>
+      <p:sp>
+        <p:nvSpPr>
+          <p:cNvPr id="10" name="TextBox 9"/>
           <p:cNvSpPr txBox="1"/>
           <p:nvPr/>
         </p:nvSpPr>
         <p:spPr>
           <a:xfrm>
-            <a:off x="969264" y="4736592"/>
-            <a:ext cx="10234879" cy="1150620"/>
+            <a:off x="841247" y="2300732"/>
+            <a:ext cx="365760" cy="256032"/>
           </a:xfrm>
           <a:prstGeom prst="rect">
             <a:avLst/>
@@ -4994,19 +4971,898 @@
           </a:bodyPr>
           <a:lstStyle/>
           <a:p>
+            <a:pPr algn="ctr">
+              <a:lnSpc>
+                <a:spcPct val="135000"/>
+              </a:lnSpc>
+            </a:pPr>
+            <a:r>
+              <a:rPr sz="1500" b="1" i="0">
+                <a:solidFill>
+                  <a:srgbClr val="1D6B8F"/>
+                </a:solidFill>
+                <a:latin typeface="Verdana"/>
+              </a:rPr>
+              <a:t>1</a:t>
+            </a:r>
+          </a:p>
+        </p:txBody>
+      </p:sp>
+      <p:sp>
+        <p:nvSpPr>
+          <p:cNvPr id="11" name="TextBox 10"/>
+          <p:cNvSpPr txBox="1"/>
+          <p:nvPr/>
+        </p:nvSpPr>
+        <p:spPr>
+          <a:xfrm>
+            <a:off x="1344168" y="2295144"/>
+            <a:ext cx="10097719" cy="285496"/>
+          </a:xfrm>
+          <a:prstGeom prst="rect">
+            <a:avLst/>
+          </a:prstGeom>
+          <a:noFill/>
+        </p:spPr>
+        <p:txBody>
+          <a:bodyPr wrap="square" lIns="0" rIns="0" tIns="0" bIns="0" anchor="t">
+            <a:spAutoFit/>
+          </a:bodyPr>
+          <a:lstStyle/>
+          <a:p>
             <a:pPr algn="l">
               <a:lnSpc>
-                <a:spcPct val="145000"/>
+                <a:spcPct val="140000"/>
               </a:lnSpc>
             </a:pPr>
             <a:r>
-              <a:rPr sz="2000" b="0" i="0">
-                <a:solidFill>
-                  <a:srgbClr val="4B4F52"/>
-                </a:solidFill>
-                <a:latin typeface="Verdana"/>
-              </a:rPr>
-              <a:t>Une politique interne s'applique parce que l'employeur s'y engage. Elle peut être meilleure que la loi - jamais moins bonne. Savoir de quel texte vient une règle change tout : on négocie une politique, on n'en négocie pas une loi.</a:t>
+              <a:rPr sz="1400" b="0" i="0">
+                <a:solidFill>
+                  <a:srgbClr val="3A3D40"/>
+                </a:solidFill>
+                <a:latin typeface="Verdana"/>
+              </a:rPr>
+              <a:t>À partir de combien de travailleurs un programme est-il obligatoire ?</a:t>
+            </a:r>
+          </a:p>
+        </p:txBody>
+      </p:sp>
+      <p:sp>
+        <p:nvSpPr>
+          <p:cNvPr id="12" name="Rounded Rectangle 11"/>
+          <p:cNvSpPr/>
+          <p:nvPr/>
+        </p:nvSpPr>
+        <p:spPr>
+          <a:xfrm>
+            <a:off x="566928" y="2827528"/>
+            <a:ext cx="11057839" cy="559816"/>
+          </a:xfrm>
+          <a:prstGeom prst="roundRect">
+            <a:avLst>
+              <a:gd name="adj" fmla="val 26134"/>
+            </a:avLst>
+          </a:prstGeom>
+          <a:solidFill>
+            <a:srgbClr val="FFFFFF"/>
+          </a:solidFill>
+          <a:ln w="12700">
+            <a:solidFill>
+              <a:srgbClr val="EAEAE8"/>
+            </a:solidFill>
+          </a:ln>
+          <a:effectLst/>
+        </p:spPr>
+        <p:style>
+          <a:lnRef idx="1">
+            <a:schemeClr val="accent1"/>
+          </a:lnRef>
+          <a:fillRef idx="3">
+            <a:schemeClr val="accent1"/>
+          </a:fillRef>
+          <a:effectRef idx="2">
+            <a:schemeClr val="accent1"/>
+          </a:effectRef>
+          <a:fontRef idx="minor">
+            <a:schemeClr val="lt1"/>
+          </a:fontRef>
+        </p:style>
+        <p:txBody>
+          <a:bodyPr rtlCol="0" anchor="ctr"/>
+          <a:lstStyle/>
+          <a:p/>
+        </p:txBody>
+      </p:sp>
+      <p:sp>
+        <p:nvSpPr>
+          <p:cNvPr id="13" name="Rounded Rectangle 12"/>
+          <p:cNvSpPr/>
+          <p:nvPr/>
+        </p:nvSpPr>
+        <p:spPr>
+          <a:xfrm>
+            <a:off x="841247" y="2924556"/>
+            <a:ext cx="365760" cy="365760"/>
+          </a:xfrm>
+          <a:prstGeom prst="roundRect">
+            <a:avLst>
+              <a:gd name="adj" fmla="val 32500"/>
+            </a:avLst>
+          </a:prstGeom>
+          <a:solidFill>
+            <a:srgbClr val="E7F0F6"/>
+          </a:solidFill>
+          <a:ln>
+            <a:noFill/>
+          </a:ln>
+          <a:effectLst/>
+        </p:spPr>
+        <p:style>
+          <a:lnRef idx="1">
+            <a:schemeClr val="accent1"/>
+          </a:lnRef>
+          <a:fillRef idx="3">
+            <a:schemeClr val="accent1"/>
+          </a:fillRef>
+          <a:effectRef idx="2">
+            <a:schemeClr val="accent1"/>
+          </a:effectRef>
+          <a:fontRef idx="minor">
+            <a:schemeClr val="lt1"/>
+          </a:fontRef>
+        </p:style>
+        <p:txBody>
+          <a:bodyPr rtlCol="0" anchor="ctr"/>
+          <a:lstStyle/>
+          <a:p/>
+        </p:txBody>
+      </p:sp>
+      <p:sp>
+        <p:nvSpPr>
+          <p:cNvPr id="14" name="TextBox 13"/>
+          <p:cNvSpPr txBox="1"/>
+          <p:nvPr/>
+        </p:nvSpPr>
+        <p:spPr>
+          <a:xfrm>
+            <a:off x="841247" y="2988564"/>
+            <a:ext cx="365760" cy="256032"/>
+          </a:xfrm>
+          <a:prstGeom prst="rect">
+            <a:avLst/>
+          </a:prstGeom>
+          <a:noFill/>
+        </p:spPr>
+        <p:txBody>
+          <a:bodyPr wrap="square" lIns="0" rIns="0" tIns="0" bIns="0" anchor="t">
+            <a:spAutoFit/>
+          </a:bodyPr>
+          <a:lstStyle/>
+          <a:p>
+            <a:pPr algn="ctr">
+              <a:lnSpc>
+                <a:spcPct val="135000"/>
+              </a:lnSpc>
+            </a:pPr>
+            <a:r>
+              <a:rPr sz="1500" b="1" i="0">
+                <a:solidFill>
+                  <a:srgbClr val="1D6B8F"/>
+                </a:solidFill>
+                <a:latin typeface="Verdana"/>
+              </a:rPr>
+              <a:t>2</a:t>
+            </a:r>
+          </a:p>
+        </p:txBody>
+      </p:sp>
+      <p:sp>
+        <p:nvSpPr>
+          <p:cNvPr id="15" name="TextBox 14"/>
+          <p:cNvSpPr txBox="1"/>
+          <p:nvPr/>
+        </p:nvSpPr>
+        <p:spPr>
+          <a:xfrm>
+            <a:off x="1344168" y="2982975"/>
+            <a:ext cx="10097719" cy="285496"/>
+          </a:xfrm>
+          <a:prstGeom prst="rect">
+            <a:avLst/>
+          </a:prstGeom>
+          <a:noFill/>
+        </p:spPr>
+        <p:txBody>
+          <a:bodyPr wrap="square" lIns="0" rIns="0" tIns="0" bIns="0" anchor="t">
+            <a:spAutoFit/>
+          </a:bodyPr>
+          <a:lstStyle/>
+          <a:p>
+            <a:pPr algn="l">
+              <a:lnSpc>
+                <a:spcPct val="140000"/>
+              </a:lnSpc>
+            </a:pPr>
+            <a:r>
+              <a:rPr sz="1400" b="0" i="0">
+                <a:solidFill>
+                  <a:srgbClr val="3A3D40"/>
+                </a:solidFill>
+                <a:latin typeface="Verdana"/>
+              </a:rPr>
+              <a:t>À quelle fréquence se met-il à jour ?</a:t>
+            </a:r>
+          </a:p>
+        </p:txBody>
+      </p:sp>
+      <p:sp>
+        <p:nvSpPr>
+          <p:cNvPr id="16" name="Rounded Rectangle 15"/>
+          <p:cNvSpPr/>
+          <p:nvPr/>
+        </p:nvSpPr>
+        <p:spPr>
+          <a:xfrm>
+            <a:off x="566928" y="3515359"/>
+            <a:ext cx="11057839" cy="559816"/>
+          </a:xfrm>
+          <a:prstGeom prst="roundRect">
+            <a:avLst>
+              <a:gd name="adj" fmla="val 26134"/>
+            </a:avLst>
+          </a:prstGeom>
+          <a:solidFill>
+            <a:srgbClr val="FFFFFF"/>
+          </a:solidFill>
+          <a:ln w="12700">
+            <a:solidFill>
+              <a:srgbClr val="EAEAE8"/>
+            </a:solidFill>
+          </a:ln>
+          <a:effectLst/>
+        </p:spPr>
+        <p:style>
+          <a:lnRef idx="1">
+            <a:schemeClr val="accent1"/>
+          </a:lnRef>
+          <a:fillRef idx="3">
+            <a:schemeClr val="accent1"/>
+          </a:fillRef>
+          <a:effectRef idx="2">
+            <a:schemeClr val="accent1"/>
+          </a:effectRef>
+          <a:fontRef idx="minor">
+            <a:schemeClr val="lt1"/>
+          </a:fontRef>
+        </p:style>
+        <p:txBody>
+          <a:bodyPr rtlCol="0" anchor="ctr"/>
+          <a:lstStyle/>
+          <a:p/>
+        </p:txBody>
+      </p:sp>
+      <p:sp>
+        <p:nvSpPr>
+          <p:cNvPr id="17" name="Rounded Rectangle 16"/>
+          <p:cNvSpPr/>
+          <p:nvPr/>
+        </p:nvSpPr>
+        <p:spPr>
+          <a:xfrm>
+            <a:off x="841247" y="3612388"/>
+            <a:ext cx="365760" cy="365760"/>
+          </a:xfrm>
+          <a:prstGeom prst="roundRect">
+            <a:avLst>
+              <a:gd name="adj" fmla="val 32500"/>
+            </a:avLst>
+          </a:prstGeom>
+          <a:solidFill>
+            <a:srgbClr val="E7F0F6"/>
+          </a:solidFill>
+          <a:ln>
+            <a:noFill/>
+          </a:ln>
+          <a:effectLst/>
+        </p:spPr>
+        <p:style>
+          <a:lnRef idx="1">
+            <a:schemeClr val="accent1"/>
+          </a:lnRef>
+          <a:fillRef idx="3">
+            <a:schemeClr val="accent1"/>
+          </a:fillRef>
+          <a:effectRef idx="2">
+            <a:schemeClr val="accent1"/>
+          </a:effectRef>
+          <a:fontRef idx="minor">
+            <a:schemeClr val="lt1"/>
+          </a:fontRef>
+        </p:style>
+        <p:txBody>
+          <a:bodyPr rtlCol="0" anchor="ctr"/>
+          <a:lstStyle/>
+          <a:p/>
+        </p:txBody>
+      </p:sp>
+      <p:sp>
+        <p:nvSpPr>
+          <p:cNvPr id="18" name="TextBox 17"/>
+          <p:cNvSpPr txBox="1"/>
+          <p:nvPr/>
+        </p:nvSpPr>
+        <p:spPr>
+          <a:xfrm>
+            <a:off x="841247" y="3676395"/>
+            <a:ext cx="365760" cy="256032"/>
+          </a:xfrm>
+          <a:prstGeom prst="rect">
+            <a:avLst/>
+          </a:prstGeom>
+          <a:noFill/>
+        </p:spPr>
+        <p:txBody>
+          <a:bodyPr wrap="square" lIns="0" rIns="0" tIns="0" bIns="0" anchor="t">
+            <a:spAutoFit/>
+          </a:bodyPr>
+          <a:lstStyle/>
+          <a:p>
+            <a:pPr algn="ctr">
+              <a:lnSpc>
+                <a:spcPct val="135000"/>
+              </a:lnSpc>
+            </a:pPr>
+            <a:r>
+              <a:rPr sz="1500" b="1" i="0">
+                <a:solidFill>
+                  <a:srgbClr val="1D6B8F"/>
+                </a:solidFill>
+                <a:latin typeface="Verdana"/>
+              </a:rPr>
+              <a:t>3</a:t>
+            </a:r>
+          </a:p>
+        </p:txBody>
+      </p:sp>
+      <p:sp>
+        <p:nvSpPr>
+          <p:cNvPr id="19" name="TextBox 18"/>
+          <p:cNvSpPr txBox="1"/>
+          <p:nvPr/>
+        </p:nvSpPr>
+        <p:spPr>
+          <a:xfrm>
+            <a:off x="1344168" y="3670807"/>
+            <a:ext cx="10097719" cy="285496"/>
+          </a:xfrm>
+          <a:prstGeom prst="rect">
+            <a:avLst/>
+          </a:prstGeom>
+          <a:noFill/>
+        </p:spPr>
+        <p:txBody>
+          <a:bodyPr wrap="square" lIns="0" rIns="0" tIns="0" bIns="0" anchor="t">
+            <a:spAutoFit/>
+          </a:bodyPr>
+          <a:lstStyle/>
+          <a:p>
+            <a:pPr algn="l">
+              <a:lnSpc>
+                <a:spcPct val="140000"/>
+              </a:lnSpc>
+            </a:pPr>
+            <a:r>
+              <a:rPr sz="1400" b="0" i="0">
+                <a:solidFill>
+                  <a:srgbClr val="3A3D40"/>
+                </a:solidFill>
+                <a:latin typeface="Verdana"/>
+              </a:rPr>
+              <a:t>Qui élit le représentant en santé et en sécurité ?</a:t>
+            </a:r>
+          </a:p>
+        </p:txBody>
+      </p:sp>
+      <p:sp>
+        <p:nvSpPr>
+          <p:cNvPr id="20" name="Rounded Rectangle 19"/>
+          <p:cNvSpPr/>
+          <p:nvPr/>
+        </p:nvSpPr>
+        <p:spPr>
+          <a:xfrm>
+            <a:off x="566928" y="4203192"/>
+            <a:ext cx="11057839" cy="559816"/>
+          </a:xfrm>
+          <a:prstGeom prst="roundRect">
+            <a:avLst>
+              <a:gd name="adj" fmla="val 26134"/>
+            </a:avLst>
+          </a:prstGeom>
+          <a:solidFill>
+            <a:srgbClr val="FFFFFF"/>
+          </a:solidFill>
+          <a:ln w="12700">
+            <a:solidFill>
+              <a:srgbClr val="EAEAE8"/>
+            </a:solidFill>
+          </a:ln>
+          <a:effectLst/>
+        </p:spPr>
+        <p:style>
+          <a:lnRef idx="1">
+            <a:schemeClr val="accent1"/>
+          </a:lnRef>
+          <a:fillRef idx="3">
+            <a:schemeClr val="accent1"/>
+          </a:fillRef>
+          <a:effectRef idx="2">
+            <a:schemeClr val="accent1"/>
+          </a:effectRef>
+          <a:fontRef idx="minor">
+            <a:schemeClr val="lt1"/>
+          </a:fontRef>
+        </p:style>
+        <p:txBody>
+          <a:bodyPr rtlCol="0" anchor="ctr"/>
+          <a:lstStyle/>
+          <a:p/>
+        </p:txBody>
+      </p:sp>
+      <p:sp>
+        <p:nvSpPr>
+          <p:cNvPr id="21" name="Rounded Rectangle 20"/>
+          <p:cNvSpPr/>
+          <p:nvPr/>
+        </p:nvSpPr>
+        <p:spPr>
+          <a:xfrm>
+            <a:off x="841247" y="4300220"/>
+            <a:ext cx="365760" cy="365760"/>
+          </a:xfrm>
+          <a:prstGeom prst="roundRect">
+            <a:avLst>
+              <a:gd name="adj" fmla="val 32500"/>
+            </a:avLst>
+          </a:prstGeom>
+          <a:solidFill>
+            <a:srgbClr val="E7F0F6"/>
+          </a:solidFill>
+          <a:ln>
+            <a:noFill/>
+          </a:ln>
+          <a:effectLst/>
+        </p:spPr>
+        <p:style>
+          <a:lnRef idx="1">
+            <a:schemeClr val="accent1"/>
+          </a:lnRef>
+          <a:fillRef idx="3">
+            <a:schemeClr val="accent1"/>
+          </a:fillRef>
+          <a:effectRef idx="2">
+            <a:schemeClr val="accent1"/>
+          </a:effectRef>
+          <a:fontRef idx="minor">
+            <a:schemeClr val="lt1"/>
+          </a:fontRef>
+        </p:style>
+        <p:txBody>
+          <a:bodyPr rtlCol="0" anchor="ctr"/>
+          <a:lstStyle/>
+          <a:p/>
+        </p:txBody>
+      </p:sp>
+      <p:sp>
+        <p:nvSpPr>
+          <p:cNvPr id="22" name="TextBox 21"/>
+          <p:cNvSpPr txBox="1"/>
+          <p:nvPr/>
+        </p:nvSpPr>
+        <p:spPr>
+          <a:xfrm>
+            <a:off x="841247" y="4364228"/>
+            <a:ext cx="365760" cy="256032"/>
+          </a:xfrm>
+          <a:prstGeom prst="rect">
+            <a:avLst/>
+          </a:prstGeom>
+          <a:noFill/>
+        </p:spPr>
+        <p:txBody>
+          <a:bodyPr wrap="square" lIns="0" rIns="0" tIns="0" bIns="0" anchor="t">
+            <a:spAutoFit/>
+          </a:bodyPr>
+          <a:lstStyle/>
+          <a:p>
+            <a:pPr algn="ctr">
+              <a:lnSpc>
+                <a:spcPct val="135000"/>
+              </a:lnSpc>
+            </a:pPr>
+            <a:r>
+              <a:rPr sz="1500" b="1" i="0">
+                <a:solidFill>
+                  <a:srgbClr val="1D6B8F"/>
+                </a:solidFill>
+                <a:latin typeface="Verdana"/>
+              </a:rPr>
+              <a:t>4</a:t>
+            </a:r>
+          </a:p>
+        </p:txBody>
+      </p:sp>
+      <p:sp>
+        <p:nvSpPr>
+          <p:cNvPr id="23" name="TextBox 22"/>
+          <p:cNvSpPr txBox="1"/>
+          <p:nvPr/>
+        </p:nvSpPr>
+        <p:spPr>
+          <a:xfrm>
+            <a:off x="1344168" y="4358640"/>
+            <a:ext cx="10097719" cy="285496"/>
+          </a:xfrm>
+          <a:prstGeom prst="rect">
+            <a:avLst/>
+          </a:prstGeom>
+          <a:noFill/>
+        </p:spPr>
+        <p:txBody>
+          <a:bodyPr wrap="square" lIns="0" rIns="0" tIns="0" bIns="0" anchor="t">
+            <a:spAutoFit/>
+          </a:bodyPr>
+          <a:lstStyle/>
+          <a:p>
+            <a:pPr algn="l">
+              <a:lnSpc>
+                <a:spcPct val="140000"/>
+              </a:lnSpc>
+            </a:pPr>
+            <a:r>
+              <a:rPr sz="1400" b="0" i="0">
+                <a:solidFill>
+                  <a:srgbClr val="3A3D40"/>
+                </a:solidFill>
+                <a:latin typeface="Verdana"/>
+              </a:rPr>
+              <a:t>Dans quel cas peut-on refuser un travail ?</a:t>
+            </a:r>
+          </a:p>
+        </p:txBody>
+      </p:sp>
+      <p:sp>
+        <p:nvSpPr>
+          <p:cNvPr id="24" name="Rounded Rectangle 23"/>
+          <p:cNvSpPr/>
+          <p:nvPr/>
+        </p:nvSpPr>
+        <p:spPr>
+          <a:xfrm>
+            <a:off x="566928" y="4891023"/>
+            <a:ext cx="11057839" cy="559816"/>
+          </a:xfrm>
+          <a:prstGeom prst="roundRect">
+            <a:avLst>
+              <a:gd name="adj" fmla="val 26134"/>
+            </a:avLst>
+          </a:prstGeom>
+          <a:solidFill>
+            <a:srgbClr val="FFFFFF"/>
+          </a:solidFill>
+          <a:ln w="12700">
+            <a:solidFill>
+              <a:srgbClr val="EAEAE8"/>
+            </a:solidFill>
+          </a:ln>
+          <a:effectLst/>
+        </p:spPr>
+        <p:style>
+          <a:lnRef idx="1">
+            <a:schemeClr val="accent1"/>
+          </a:lnRef>
+          <a:fillRef idx="3">
+            <a:schemeClr val="accent1"/>
+          </a:fillRef>
+          <a:effectRef idx="2">
+            <a:schemeClr val="accent1"/>
+          </a:effectRef>
+          <a:fontRef idx="minor">
+            <a:schemeClr val="lt1"/>
+          </a:fontRef>
+        </p:style>
+        <p:txBody>
+          <a:bodyPr rtlCol="0" anchor="ctr"/>
+          <a:lstStyle/>
+          <a:p/>
+        </p:txBody>
+      </p:sp>
+      <p:sp>
+        <p:nvSpPr>
+          <p:cNvPr id="25" name="Rounded Rectangle 24"/>
+          <p:cNvSpPr/>
+          <p:nvPr/>
+        </p:nvSpPr>
+        <p:spPr>
+          <a:xfrm>
+            <a:off x="841247" y="4988051"/>
+            <a:ext cx="365760" cy="365760"/>
+          </a:xfrm>
+          <a:prstGeom prst="roundRect">
+            <a:avLst>
+              <a:gd name="adj" fmla="val 32500"/>
+            </a:avLst>
+          </a:prstGeom>
+          <a:solidFill>
+            <a:srgbClr val="E7F0F6"/>
+          </a:solidFill>
+          <a:ln>
+            <a:noFill/>
+          </a:ln>
+          <a:effectLst/>
+        </p:spPr>
+        <p:style>
+          <a:lnRef idx="1">
+            <a:schemeClr val="accent1"/>
+          </a:lnRef>
+          <a:fillRef idx="3">
+            <a:schemeClr val="accent1"/>
+          </a:fillRef>
+          <a:effectRef idx="2">
+            <a:schemeClr val="accent1"/>
+          </a:effectRef>
+          <a:fontRef idx="minor">
+            <a:schemeClr val="lt1"/>
+          </a:fontRef>
+        </p:style>
+        <p:txBody>
+          <a:bodyPr rtlCol="0" anchor="ctr"/>
+          <a:lstStyle/>
+          <a:p/>
+        </p:txBody>
+      </p:sp>
+      <p:sp>
+        <p:nvSpPr>
+          <p:cNvPr id="26" name="TextBox 25"/>
+          <p:cNvSpPr txBox="1"/>
+          <p:nvPr/>
+        </p:nvSpPr>
+        <p:spPr>
+          <a:xfrm>
+            <a:off x="841247" y="5052059"/>
+            <a:ext cx="365760" cy="256032"/>
+          </a:xfrm>
+          <a:prstGeom prst="rect">
+            <a:avLst/>
+          </a:prstGeom>
+          <a:noFill/>
+        </p:spPr>
+        <p:txBody>
+          <a:bodyPr wrap="square" lIns="0" rIns="0" tIns="0" bIns="0" anchor="t">
+            <a:spAutoFit/>
+          </a:bodyPr>
+          <a:lstStyle/>
+          <a:p>
+            <a:pPr algn="ctr">
+              <a:lnSpc>
+                <a:spcPct val="135000"/>
+              </a:lnSpc>
+            </a:pPr>
+            <a:r>
+              <a:rPr sz="1500" b="1" i="0">
+                <a:solidFill>
+                  <a:srgbClr val="1D6B8F"/>
+                </a:solidFill>
+                <a:latin typeface="Verdana"/>
+              </a:rPr>
+              <a:t>5</a:t>
+            </a:r>
+          </a:p>
+        </p:txBody>
+      </p:sp>
+      <p:sp>
+        <p:nvSpPr>
+          <p:cNvPr id="27" name="TextBox 26"/>
+          <p:cNvSpPr txBox="1"/>
+          <p:nvPr/>
+        </p:nvSpPr>
+        <p:spPr>
+          <a:xfrm>
+            <a:off x="1344168" y="5046471"/>
+            <a:ext cx="10097719" cy="285496"/>
+          </a:xfrm>
+          <a:prstGeom prst="rect">
+            <a:avLst/>
+          </a:prstGeom>
+          <a:noFill/>
+        </p:spPr>
+        <p:txBody>
+          <a:bodyPr wrap="square" lIns="0" rIns="0" tIns="0" bIns="0" anchor="t">
+            <a:spAutoFit/>
+          </a:bodyPr>
+          <a:lstStyle/>
+          <a:p>
+            <a:pPr algn="l">
+              <a:lnSpc>
+                <a:spcPct val="140000"/>
+              </a:lnSpc>
+            </a:pPr>
+            <a:r>
+              <a:rPr sz="1400" b="0" i="0">
+                <a:solidFill>
+                  <a:srgbClr val="3A3D40"/>
+                </a:solidFill>
+                <a:latin typeface="Verdana"/>
+              </a:rPr>
+              <a:t>Peut-on refuser si les conditions sont normales pour ce métier ?</a:t>
+            </a:r>
+          </a:p>
+        </p:txBody>
+      </p:sp>
+      <p:sp>
+        <p:nvSpPr>
+          <p:cNvPr id="28" name="Rounded Rectangle 27"/>
+          <p:cNvSpPr/>
+          <p:nvPr/>
+        </p:nvSpPr>
+        <p:spPr>
+          <a:xfrm>
+            <a:off x="566928" y="5578856"/>
+            <a:ext cx="11057839" cy="559816"/>
+          </a:xfrm>
+          <a:prstGeom prst="roundRect">
+            <a:avLst>
+              <a:gd name="adj" fmla="val 26134"/>
+            </a:avLst>
+          </a:prstGeom>
+          <a:solidFill>
+            <a:srgbClr val="FFFFFF"/>
+          </a:solidFill>
+          <a:ln w="12700">
+            <a:solidFill>
+              <a:srgbClr val="EAEAE8"/>
+            </a:solidFill>
+          </a:ln>
+          <a:effectLst/>
+        </p:spPr>
+        <p:style>
+          <a:lnRef idx="1">
+            <a:schemeClr val="accent1"/>
+          </a:lnRef>
+          <a:fillRef idx="3">
+            <a:schemeClr val="accent1"/>
+          </a:fillRef>
+          <a:effectRef idx="2">
+            <a:schemeClr val="accent1"/>
+          </a:effectRef>
+          <a:fontRef idx="minor">
+            <a:schemeClr val="lt1"/>
+          </a:fontRef>
+        </p:style>
+        <p:txBody>
+          <a:bodyPr rtlCol="0" anchor="ctr"/>
+          <a:lstStyle/>
+          <a:p/>
+        </p:txBody>
+      </p:sp>
+      <p:sp>
+        <p:nvSpPr>
+          <p:cNvPr id="29" name="Rounded Rectangle 28"/>
+          <p:cNvSpPr/>
+          <p:nvPr/>
+        </p:nvSpPr>
+        <p:spPr>
+          <a:xfrm>
+            <a:off x="841247" y="5675884"/>
+            <a:ext cx="365760" cy="365760"/>
+          </a:xfrm>
+          <a:prstGeom prst="roundRect">
+            <a:avLst>
+              <a:gd name="adj" fmla="val 32500"/>
+            </a:avLst>
+          </a:prstGeom>
+          <a:solidFill>
+            <a:srgbClr val="E7F0F6"/>
+          </a:solidFill>
+          <a:ln>
+            <a:noFill/>
+          </a:ln>
+          <a:effectLst/>
+        </p:spPr>
+        <p:style>
+          <a:lnRef idx="1">
+            <a:schemeClr val="accent1"/>
+          </a:lnRef>
+          <a:fillRef idx="3">
+            <a:schemeClr val="accent1"/>
+          </a:fillRef>
+          <a:effectRef idx="2">
+            <a:schemeClr val="accent1"/>
+          </a:effectRef>
+          <a:fontRef idx="minor">
+            <a:schemeClr val="lt1"/>
+          </a:fontRef>
+        </p:style>
+        <p:txBody>
+          <a:bodyPr rtlCol="0" anchor="ctr"/>
+          <a:lstStyle/>
+          <a:p/>
+        </p:txBody>
+      </p:sp>
+      <p:sp>
+        <p:nvSpPr>
+          <p:cNvPr id="30" name="TextBox 29"/>
+          <p:cNvSpPr txBox="1"/>
+          <p:nvPr/>
+        </p:nvSpPr>
+        <p:spPr>
+          <a:xfrm>
+            <a:off x="841247" y="5739892"/>
+            <a:ext cx="365760" cy="256032"/>
+          </a:xfrm>
+          <a:prstGeom prst="rect">
+            <a:avLst/>
+          </a:prstGeom>
+          <a:noFill/>
+        </p:spPr>
+        <p:txBody>
+          <a:bodyPr wrap="square" lIns="0" rIns="0" tIns="0" bIns="0" anchor="t">
+            <a:spAutoFit/>
+          </a:bodyPr>
+          <a:lstStyle/>
+          <a:p>
+            <a:pPr algn="ctr">
+              <a:lnSpc>
+                <a:spcPct val="135000"/>
+              </a:lnSpc>
+            </a:pPr>
+            <a:r>
+              <a:rPr sz="1500" b="1" i="0">
+                <a:solidFill>
+                  <a:srgbClr val="1D6B8F"/>
+                </a:solidFill>
+                <a:latin typeface="Verdana"/>
+              </a:rPr>
+              <a:t>6</a:t>
+            </a:r>
+          </a:p>
+        </p:txBody>
+      </p:sp>
+      <p:sp>
+        <p:nvSpPr>
+          <p:cNvPr id="31" name="TextBox 30"/>
+          <p:cNvSpPr txBox="1"/>
+          <p:nvPr/>
+        </p:nvSpPr>
+        <p:spPr>
+          <a:xfrm>
+            <a:off x="1344168" y="5734304"/>
+            <a:ext cx="10097719" cy="285496"/>
+          </a:xfrm>
+          <a:prstGeom prst="rect">
+            <a:avLst/>
+          </a:prstGeom>
+          <a:noFill/>
+        </p:spPr>
+        <p:txBody>
+          <a:bodyPr wrap="square" lIns="0" rIns="0" tIns="0" bIns="0" anchor="t">
+            <a:spAutoFit/>
+          </a:bodyPr>
+          <a:lstStyle/>
+          <a:p>
+            <a:pPr algn="l">
+              <a:lnSpc>
+                <a:spcPct val="140000"/>
+              </a:lnSpc>
+            </a:pPr>
+            <a:r>
+              <a:rPr sz="1400" b="0" i="0">
+                <a:solidFill>
+                  <a:srgbClr val="3A3D40"/>
+                </a:solidFill>
+                <a:latin typeface="Verdana"/>
+              </a:rPr>
+              <a:t>Qui tranche s'il y a désaccord sur le danger ?</a:t>
             </a:r>
           </a:p>
         </p:txBody>
@@ -5151,6 +6007,1872 @@
       </p:sp>
       <p:sp>
         <p:nvSpPr>
+          <p:cNvPr id="5" name="TextBox 4"/>
+          <p:cNvSpPr txBox="1"/>
+          <p:nvPr/>
+        </p:nvSpPr>
+        <p:spPr>
+          <a:xfrm>
+            <a:off x="566928" y="420624"/>
+            <a:ext cx="11057839" cy="237744"/>
+          </a:xfrm>
+          <a:prstGeom prst="rect">
+            <a:avLst/>
+          </a:prstGeom>
+          <a:noFill/>
+        </p:spPr>
+        <p:txBody>
+          <a:bodyPr wrap="square" lIns="0" rIns="0" tIns="0" bIns="0" anchor="t">
+            <a:spAutoFit/>
+          </a:bodyPr>
+          <a:lstStyle/>
+          <a:p>
+            <a:pPr algn="l">
+              <a:lnSpc>
+                <a:spcPct val="135000"/>
+              </a:lnSpc>
+            </a:pPr>
+            <a:r>
+              <a:rPr sz="1300" b="1" i="0" spc="156">
+                <a:solidFill>
+                  <a:srgbClr val="1D6B8F"/>
+                </a:solidFill>
+                <a:latin typeface="Verdana"/>
+              </a:rPr>
+              <a:t>CORRECTION</a:t>
+            </a:r>
+          </a:p>
+        </p:txBody>
+      </p:sp>
+      <p:sp>
+        <p:nvSpPr>
+          <p:cNvPr id="6" name="TextBox 5"/>
+          <p:cNvSpPr txBox="1"/>
+          <p:nvPr/>
+        </p:nvSpPr>
+        <p:spPr>
+          <a:xfrm>
+            <a:off x="566928" y="749808"/>
+            <a:ext cx="11057839" cy="877824"/>
+          </a:xfrm>
+          <a:prstGeom prst="rect">
+            <a:avLst/>
+          </a:prstGeom>
+          <a:noFill/>
+        </p:spPr>
+        <p:txBody>
+          <a:bodyPr wrap="square" lIns="0" rIns="0" tIns="0" bIns="0" anchor="t">
+            <a:spAutoFit/>
+          </a:bodyPr>
+          <a:lstStyle/>
+          <a:p>
+            <a:pPr algn="l">
+              <a:lnSpc>
+                <a:spcPct val="115000"/>
+              </a:lnSpc>
+            </a:pPr>
+            <a:r>
+              <a:rPr sz="3400" b="1" i="0">
+                <a:solidFill>
+                  <a:srgbClr val="17181A"/>
+                </a:solidFill>
+                <a:latin typeface="Verdana"/>
+              </a:rPr>
+              <a:t>Six questions sur le document</a:t>
+            </a:r>
+          </a:p>
+        </p:txBody>
+      </p:sp>
+      <p:sp>
+        <p:nvSpPr>
+          <p:cNvPr id="7" name="TextBox 6"/>
+          <p:cNvSpPr txBox="1"/>
+          <p:nvPr/>
+        </p:nvSpPr>
+        <p:spPr>
+          <a:xfrm>
+            <a:off x="566928" y="1645920"/>
+            <a:ext cx="11057839" cy="329184"/>
+          </a:xfrm>
+          <a:prstGeom prst="rect">
+            <a:avLst/>
+          </a:prstGeom>
+          <a:noFill/>
+        </p:spPr>
+        <p:txBody>
+          <a:bodyPr wrap="square" lIns="0" rIns="0" tIns="0" bIns="0" anchor="t">
+            <a:spAutoFit/>
+          </a:bodyPr>
+          <a:lstStyle/>
+          <a:p>
+            <a:pPr algn="l">
+              <a:lnSpc>
+                <a:spcPct val="135000"/>
+              </a:lnSpc>
+            </a:pPr>
+            <a:r>
+              <a:rPr sz="1800" b="0" i="0">
+                <a:solidFill>
+                  <a:srgbClr val="6E7175"/>
+                </a:solidFill>
+                <a:latin typeface="Verdana"/>
+              </a:rPr>
+              <a:t>Correction — on lit la réponse, on ne commente pas l'erreur.</a:t>
+            </a:r>
+          </a:p>
+        </p:txBody>
+      </p:sp>
+      <p:sp>
+        <p:nvSpPr>
+          <p:cNvPr id="8" name="Rounded Rectangle 7"/>
+          <p:cNvSpPr/>
+          <p:nvPr/>
+        </p:nvSpPr>
+        <p:spPr>
+          <a:xfrm>
+            <a:off x="566928" y="2139696"/>
+            <a:ext cx="11057839" cy="559816"/>
+          </a:xfrm>
+          <a:prstGeom prst="roundRect">
+            <a:avLst>
+              <a:gd name="adj" fmla="val 26134"/>
+            </a:avLst>
+          </a:prstGeom>
+          <a:solidFill>
+            <a:srgbClr val="E6F5EE"/>
+          </a:solidFill>
+          <a:ln w="12700">
+            <a:solidFill>
+              <a:srgbClr val="EAEAE8"/>
+            </a:solidFill>
+          </a:ln>
+          <a:effectLst/>
+        </p:spPr>
+        <p:style>
+          <a:lnRef idx="1">
+            <a:schemeClr val="accent1"/>
+          </a:lnRef>
+          <a:fillRef idx="3">
+            <a:schemeClr val="accent1"/>
+          </a:fillRef>
+          <a:effectRef idx="2">
+            <a:schemeClr val="accent1"/>
+          </a:effectRef>
+          <a:fontRef idx="minor">
+            <a:schemeClr val="lt1"/>
+          </a:fontRef>
+        </p:style>
+        <p:txBody>
+          <a:bodyPr rtlCol="0" anchor="ctr"/>
+          <a:lstStyle/>
+          <a:p/>
+        </p:txBody>
+      </p:sp>
+      <p:sp>
+        <p:nvSpPr>
+          <p:cNvPr id="9" name="Rounded Rectangle 8"/>
+          <p:cNvSpPr/>
+          <p:nvPr/>
+        </p:nvSpPr>
+        <p:spPr>
+          <a:xfrm>
+            <a:off x="841247" y="2236724"/>
+            <a:ext cx="365760" cy="365760"/>
+          </a:xfrm>
+          <a:prstGeom prst="roundRect">
+            <a:avLst>
+              <a:gd name="adj" fmla="val 32500"/>
+            </a:avLst>
+          </a:prstGeom>
+          <a:solidFill>
+            <a:srgbClr val="E7F0F6"/>
+          </a:solidFill>
+          <a:ln>
+            <a:noFill/>
+          </a:ln>
+          <a:effectLst/>
+        </p:spPr>
+        <p:style>
+          <a:lnRef idx="1">
+            <a:schemeClr val="accent1"/>
+          </a:lnRef>
+          <a:fillRef idx="3">
+            <a:schemeClr val="accent1"/>
+          </a:fillRef>
+          <a:effectRef idx="2">
+            <a:schemeClr val="accent1"/>
+          </a:effectRef>
+          <a:fontRef idx="minor">
+            <a:schemeClr val="lt1"/>
+          </a:fontRef>
+        </p:style>
+        <p:txBody>
+          <a:bodyPr rtlCol="0" anchor="ctr"/>
+          <a:lstStyle/>
+          <a:p/>
+        </p:txBody>
+      </p:sp>
+      <p:sp>
+        <p:nvSpPr>
+          <p:cNvPr id="10" name="TextBox 9"/>
+          <p:cNvSpPr txBox="1"/>
+          <p:nvPr/>
+        </p:nvSpPr>
+        <p:spPr>
+          <a:xfrm>
+            <a:off x="841247" y="2300732"/>
+            <a:ext cx="365760" cy="256032"/>
+          </a:xfrm>
+          <a:prstGeom prst="rect">
+            <a:avLst/>
+          </a:prstGeom>
+          <a:noFill/>
+        </p:spPr>
+        <p:txBody>
+          <a:bodyPr wrap="square" lIns="0" rIns="0" tIns="0" bIns="0" anchor="t">
+            <a:spAutoFit/>
+          </a:bodyPr>
+          <a:lstStyle/>
+          <a:p>
+            <a:pPr algn="ctr">
+              <a:lnSpc>
+                <a:spcPct val="135000"/>
+              </a:lnSpc>
+            </a:pPr>
+            <a:r>
+              <a:rPr sz="1500" b="1" i="0">
+                <a:solidFill>
+                  <a:srgbClr val="1D6B8F"/>
+                </a:solidFill>
+                <a:latin typeface="Verdana"/>
+              </a:rPr>
+              <a:t>1</a:t>
+            </a:r>
+          </a:p>
+        </p:txBody>
+      </p:sp>
+      <p:sp>
+        <p:nvSpPr>
+          <p:cNvPr id="11" name="TextBox 10"/>
+          <p:cNvSpPr txBox="1"/>
+          <p:nvPr/>
+        </p:nvSpPr>
+        <p:spPr>
+          <a:xfrm>
+            <a:off x="1344168" y="2295144"/>
+            <a:ext cx="10097719" cy="285496"/>
+          </a:xfrm>
+          <a:prstGeom prst="rect">
+            <a:avLst/>
+          </a:prstGeom>
+          <a:noFill/>
+        </p:spPr>
+        <p:txBody>
+          <a:bodyPr wrap="square" lIns="0" rIns="0" tIns="0" bIns="0" anchor="t">
+            <a:spAutoFit/>
+          </a:bodyPr>
+          <a:lstStyle/>
+          <a:p>
+            <a:pPr algn="l">
+              <a:lnSpc>
+                <a:spcPct val="140000"/>
+              </a:lnSpc>
+            </a:pPr>
+            <a:r>
+              <a:rPr sz="1400" b="0" i="0">
+                <a:solidFill>
+                  <a:srgbClr val="3A3D40"/>
+                </a:solidFill>
+                <a:latin typeface="Verdana"/>
+              </a:rPr>
+              <a:t>À partir de combien de travailleurs un programme est-il obligatoire ?   </a:t>
+            </a:r>
+            <a:r>
+              <a:rPr sz="1400" b="1" i="0">
+                <a:solidFill>
+                  <a:srgbClr val="07734A"/>
+                </a:solidFill>
+                <a:latin typeface="Verdana"/>
+              </a:rPr>
+              <a:t>» vingt</a:t>
+            </a:r>
+          </a:p>
+        </p:txBody>
+      </p:sp>
+      <p:sp>
+        <p:nvSpPr>
+          <p:cNvPr id="12" name="Rounded Rectangle 11"/>
+          <p:cNvSpPr/>
+          <p:nvPr/>
+        </p:nvSpPr>
+        <p:spPr>
+          <a:xfrm>
+            <a:off x="566928" y="2827528"/>
+            <a:ext cx="11057839" cy="559816"/>
+          </a:xfrm>
+          <a:prstGeom prst="roundRect">
+            <a:avLst>
+              <a:gd name="adj" fmla="val 26134"/>
+            </a:avLst>
+          </a:prstGeom>
+          <a:solidFill>
+            <a:srgbClr val="E6F5EE"/>
+          </a:solidFill>
+          <a:ln w="12700">
+            <a:solidFill>
+              <a:srgbClr val="EAEAE8"/>
+            </a:solidFill>
+          </a:ln>
+          <a:effectLst/>
+        </p:spPr>
+        <p:style>
+          <a:lnRef idx="1">
+            <a:schemeClr val="accent1"/>
+          </a:lnRef>
+          <a:fillRef idx="3">
+            <a:schemeClr val="accent1"/>
+          </a:fillRef>
+          <a:effectRef idx="2">
+            <a:schemeClr val="accent1"/>
+          </a:effectRef>
+          <a:fontRef idx="minor">
+            <a:schemeClr val="lt1"/>
+          </a:fontRef>
+        </p:style>
+        <p:txBody>
+          <a:bodyPr rtlCol="0" anchor="ctr"/>
+          <a:lstStyle/>
+          <a:p/>
+        </p:txBody>
+      </p:sp>
+      <p:sp>
+        <p:nvSpPr>
+          <p:cNvPr id="13" name="Rounded Rectangle 12"/>
+          <p:cNvSpPr/>
+          <p:nvPr/>
+        </p:nvSpPr>
+        <p:spPr>
+          <a:xfrm>
+            <a:off x="841247" y="2924556"/>
+            <a:ext cx="365760" cy="365760"/>
+          </a:xfrm>
+          <a:prstGeom prst="roundRect">
+            <a:avLst>
+              <a:gd name="adj" fmla="val 32500"/>
+            </a:avLst>
+          </a:prstGeom>
+          <a:solidFill>
+            <a:srgbClr val="E7F0F6"/>
+          </a:solidFill>
+          <a:ln>
+            <a:noFill/>
+          </a:ln>
+          <a:effectLst/>
+        </p:spPr>
+        <p:style>
+          <a:lnRef idx="1">
+            <a:schemeClr val="accent1"/>
+          </a:lnRef>
+          <a:fillRef idx="3">
+            <a:schemeClr val="accent1"/>
+          </a:fillRef>
+          <a:effectRef idx="2">
+            <a:schemeClr val="accent1"/>
+          </a:effectRef>
+          <a:fontRef idx="minor">
+            <a:schemeClr val="lt1"/>
+          </a:fontRef>
+        </p:style>
+        <p:txBody>
+          <a:bodyPr rtlCol="0" anchor="ctr"/>
+          <a:lstStyle/>
+          <a:p/>
+        </p:txBody>
+      </p:sp>
+      <p:sp>
+        <p:nvSpPr>
+          <p:cNvPr id="14" name="TextBox 13"/>
+          <p:cNvSpPr txBox="1"/>
+          <p:nvPr/>
+        </p:nvSpPr>
+        <p:spPr>
+          <a:xfrm>
+            <a:off x="841247" y="2988564"/>
+            <a:ext cx="365760" cy="256032"/>
+          </a:xfrm>
+          <a:prstGeom prst="rect">
+            <a:avLst/>
+          </a:prstGeom>
+          <a:noFill/>
+        </p:spPr>
+        <p:txBody>
+          <a:bodyPr wrap="square" lIns="0" rIns="0" tIns="0" bIns="0" anchor="t">
+            <a:spAutoFit/>
+          </a:bodyPr>
+          <a:lstStyle/>
+          <a:p>
+            <a:pPr algn="ctr">
+              <a:lnSpc>
+                <a:spcPct val="135000"/>
+              </a:lnSpc>
+            </a:pPr>
+            <a:r>
+              <a:rPr sz="1500" b="1" i="0">
+                <a:solidFill>
+                  <a:srgbClr val="1D6B8F"/>
+                </a:solidFill>
+                <a:latin typeface="Verdana"/>
+              </a:rPr>
+              <a:t>2</a:t>
+            </a:r>
+          </a:p>
+        </p:txBody>
+      </p:sp>
+      <p:sp>
+        <p:nvSpPr>
+          <p:cNvPr id="15" name="TextBox 14"/>
+          <p:cNvSpPr txBox="1"/>
+          <p:nvPr/>
+        </p:nvSpPr>
+        <p:spPr>
+          <a:xfrm>
+            <a:off x="1344168" y="2982975"/>
+            <a:ext cx="10097719" cy="285496"/>
+          </a:xfrm>
+          <a:prstGeom prst="rect">
+            <a:avLst/>
+          </a:prstGeom>
+          <a:noFill/>
+        </p:spPr>
+        <p:txBody>
+          <a:bodyPr wrap="square" lIns="0" rIns="0" tIns="0" bIns="0" anchor="t">
+            <a:spAutoFit/>
+          </a:bodyPr>
+          <a:lstStyle/>
+          <a:p>
+            <a:pPr algn="l">
+              <a:lnSpc>
+                <a:spcPct val="140000"/>
+              </a:lnSpc>
+            </a:pPr>
+            <a:r>
+              <a:rPr sz="1400" b="0" i="0">
+                <a:solidFill>
+                  <a:srgbClr val="3A3D40"/>
+                </a:solidFill>
+                <a:latin typeface="Verdana"/>
+              </a:rPr>
+              <a:t>À quelle fréquence se met-il à jour ?   </a:t>
+            </a:r>
+            <a:r>
+              <a:rPr sz="1400" b="1" i="0">
+                <a:solidFill>
+                  <a:srgbClr val="07734A"/>
+                </a:solidFill>
+                <a:latin typeface="Verdana"/>
+              </a:rPr>
+              <a:t>» chaque année</a:t>
+            </a:r>
+          </a:p>
+        </p:txBody>
+      </p:sp>
+      <p:sp>
+        <p:nvSpPr>
+          <p:cNvPr id="16" name="Rounded Rectangle 15"/>
+          <p:cNvSpPr/>
+          <p:nvPr/>
+        </p:nvSpPr>
+        <p:spPr>
+          <a:xfrm>
+            <a:off x="566928" y="3515359"/>
+            <a:ext cx="11057839" cy="559816"/>
+          </a:xfrm>
+          <a:prstGeom prst="roundRect">
+            <a:avLst>
+              <a:gd name="adj" fmla="val 26134"/>
+            </a:avLst>
+          </a:prstGeom>
+          <a:solidFill>
+            <a:srgbClr val="E6F5EE"/>
+          </a:solidFill>
+          <a:ln w="12700">
+            <a:solidFill>
+              <a:srgbClr val="EAEAE8"/>
+            </a:solidFill>
+          </a:ln>
+          <a:effectLst/>
+        </p:spPr>
+        <p:style>
+          <a:lnRef idx="1">
+            <a:schemeClr val="accent1"/>
+          </a:lnRef>
+          <a:fillRef idx="3">
+            <a:schemeClr val="accent1"/>
+          </a:fillRef>
+          <a:effectRef idx="2">
+            <a:schemeClr val="accent1"/>
+          </a:effectRef>
+          <a:fontRef idx="minor">
+            <a:schemeClr val="lt1"/>
+          </a:fontRef>
+        </p:style>
+        <p:txBody>
+          <a:bodyPr rtlCol="0" anchor="ctr"/>
+          <a:lstStyle/>
+          <a:p/>
+        </p:txBody>
+      </p:sp>
+      <p:sp>
+        <p:nvSpPr>
+          <p:cNvPr id="17" name="Rounded Rectangle 16"/>
+          <p:cNvSpPr/>
+          <p:nvPr/>
+        </p:nvSpPr>
+        <p:spPr>
+          <a:xfrm>
+            <a:off x="841247" y="3612388"/>
+            <a:ext cx="365760" cy="365760"/>
+          </a:xfrm>
+          <a:prstGeom prst="roundRect">
+            <a:avLst>
+              <a:gd name="adj" fmla="val 32500"/>
+            </a:avLst>
+          </a:prstGeom>
+          <a:solidFill>
+            <a:srgbClr val="E7F0F6"/>
+          </a:solidFill>
+          <a:ln>
+            <a:noFill/>
+          </a:ln>
+          <a:effectLst/>
+        </p:spPr>
+        <p:style>
+          <a:lnRef idx="1">
+            <a:schemeClr val="accent1"/>
+          </a:lnRef>
+          <a:fillRef idx="3">
+            <a:schemeClr val="accent1"/>
+          </a:fillRef>
+          <a:effectRef idx="2">
+            <a:schemeClr val="accent1"/>
+          </a:effectRef>
+          <a:fontRef idx="minor">
+            <a:schemeClr val="lt1"/>
+          </a:fontRef>
+        </p:style>
+        <p:txBody>
+          <a:bodyPr rtlCol="0" anchor="ctr"/>
+          <a:lstStyle/>
+          <a:p/>
+        </p:txBody>
+      </p:sp>
+      <p:sp>
+        <p:nvSpPr>
+          <p:cNvPr id="18" name="TextBox 17"/>
+          <p:cNvSpPr txBox="1"/>
+          <p:nvPr/>
+        </p:nvSpPr>
+        <p:spPr>
+          <a:xfrm>
+            <a:off x="841247" y="3676395"/>
+            <a:ext cx="365760" cy="256032"/>
+          </a:xfrm>
+          <a:prstGeom prst="rect">
+            <a:avLst/>
+          </a:prstGeom>
+          <a:noFill/>
+        </p:spPr>
+        <p:txBody>
+          <a:bodyPr wrap="square" lIns="0" rIns="0" tIns="0" bIns="0" anchor="t">
+            <a:spAutoFit/>
+          </a:bodyPr>
+          <a:lstStyle/>
+          <a:p>
+            <a:pPr algn="ctr">
+              <a:lnSpc>
+                <a:spcPct val="135000"/>
+              </a:lnSpc>
+            </a:pPr>
+            <a:r>
+              <a:rPr sz="1500" b="1" i="0">
+                <a:solidFill>
+                  <a:srgbClr val="1D6B8F"/>
+                </a:solidFill>
+                <a:latin typeface="Verdana"/>
+              </a:rPr>
+              <a:t>3</a:t>
+            </a:r>
+          </a:p>
+        </p:txBody>
+      </p:sp>
+      <p:sp>
+        <p:nvSpPr>
+          <p:cNvPr id="19" name="TextBox 18"/>
+          <p:cNvSpPr txBox="1"/>
+          <p:nvPr/>
+        </p:nvSpPr>
+        <p:spPr>
+          <a:xfrm>
+            <a:off x="1344168" y="3670807"/>
+            <a:ext cx="10097719" cy="285496"/>
+          </a:xfrm>
+          <a:prstGeom prst="rect">
+            <a:avLst/>
+          </a:prstGeom>
+          <a:noFill/>
+        </p:spPr>
+        <p:txBody>
+          <a:bodyPr wrap="square" lIns="0" rIns="0" tIns="0" bIns="0" anchor="t">
+            <a:spAutoFit/>
+          </a:bodyPr>
+          <a:lstStyle/>
+          <a:p>
+            <a:pPr algn="l">
+              <a:lnSpc>
+                <a:spcPct val="140000"/>
+              </a:lnSpc>
+            </a:pPr>
+            <a:r>
+              <a:rPr sz="1400" b="0" i="0">
+                <a:solidFill>
+                  <a:srgbClr val="3A3D40"/>
+                </a:solidFill>
+                <a:latin typeface="Verdana"/>
+              </a:rPr>
+              <a:t>Qui élit le représentant en santé et en sécurité ?   </a:t>
+            </a:r>
+            <a:r>
+              <a:rPr sz="1400" b="1" i="0">
+                <a:solidFill>
+                  <a:srgbClr val="07734A"/>
+                </a:solidFill>
+                <a:latin typeface="Verdana"/>
+              </a:rPr>
+              <a:t>» les travailleurs</a:t>
+            </a:r>
+          </a:p>
+        </p:txBody>
+      </p:sp>
+      <p:sp>
+        <p:nvSpPr>
+          <p:cNvPr id="20" name="Rounded Rectangle 19"/>
+          <p:cNvSpPr/>
+          <p:nvPr/>
+        </p:nvSpPr>
+        <p:spPr>
+          <a:xfrm>
+            <a:off x="566928" y="4203192"/>
+            <a:ext cx="11057839" cy="559816"/>
+          </a:xfrm>
+          <a:prstGeom prst="roundRect">
+            <a:avLst>
+              <a:gd name="adj" fmla="val 26134"/>
+            </a:avLst>
+          </a:prstGeom>
+          <a:solidFill>
+            <a:srgbClr val="E6F5EE"/>
+          </a:solidFill>
+          <a:ln w="12700">
+            <a:solidFill>
+              <a:srgbClr val="EAEAE8"/>
+            </a:solidFill>
+          </a:ln>
+          <a:effectLst/>
+        </p:spPr>
+        <p:style>
+          <a:lnRef idx="1">
+            <a:schemeClr val="accent1"/>
+          </a:lnRef>
+          <a:fillRef idx="3">
+            <a:schemeClr val="accent1"/>
+          </a:fillRef>
+          <a:effectRef idx="2">
+            <a:schemeClr val="accent1"/>
+          </a:effectRef>
+          <a:fontRef idx="minor">
+            <a:schemeClr val="lt1"/>
+          </a:fontRef>
+        </p:style>
+        <p:txBody>
+          <a:bodyPr rtlCol="0" anchor="ctr"/>
+          <a:lstStyle/>
+          <a:p/>
+        </p:txBody>
+      </p:sp>
+      <p:sp>
+        <p:nvSpPr>
+          <p:cNvPr id="21" name="Rounded Rectangle 20"/>
+          <p:cNvSpPr/>
+          <p:nvPr/>
+        </p:nvSpPr>
+        <p:spPr>
+          <a:xfrm>
+            <a:off x="841247" y="4300220"/>
+            <a:ext cx="365760" cy="365760"/>
+          </a:xfrm>
+          <a:prstGeom prst="roundRect">
+            <a:avLst>
+              <a:gd name="adj" fmla="val 32500"/>
+            </a:avLst>
+          </a:prstGeom>
+          <a:solidFill>
+            <a:srgbClr val="E7F0F6"/>
+          </a:solidFill>
+          <a:ln>
+            <a:noFill/>
+          </a:ln>
+          <a:effectLst/>
+        </p:spPr>
+        <p:style>
+          <a:lnRef idx="1">
+            <a:schemeClr val="accent1"/>
+          </a:lnRef>
+          <a:fillRef idx="3">
+            <a:schemeClr val="accent1"/>
+          </a:fillRef>
+          <a:effectRef idx="2">
+            <a:schemeClr val="accent1"/>
+          </a:effectRef>
+          <a:fontRef idx="minor">
+            <a:schemeClr val="lt1"/>
+          </a:fontRef>
+        </p:style>
+        <p:txBody>
+          <a:bodyPr rtlCol="0" anchor="ctr"/>
+          <a:lstStyle/>
+          <a:p/>
+        </p:txBody>
+      </p:sp>
+      <p:sp>
+        <p:nvSpPr>
+          <p:cNvPr id="22" name="TextBox 21"/>
+          <p:cNvSpPr txBox="1"/>
+          <p:nvPr/>
+        </p:nvSpPr>
+        <p:spPr>
+          <a:xfrm>
+            <a:off x="841247" y="4364228"/>
+            <a:ext cx="365760" cy="256032"/>
+          </a:xfrm>
+          <a:prstGeom prst="rect">
+            <a:avLst/>
+          </a:prstGeom>
+          <a:noFill/>
+        </p:spPr>
+        <p:txBody>
+          <a:bodyPr wrap="square" lIns="0" rIns="0" tIns="0" bIns="0" anchor="t">
+            <a:spAutoFit/>
+          </a:bodyPr>
+          <a:lstStyle/>
+          <a:p>
+            <a:pPr algn="ctr">
+              <a:lnSpc>
+                <a:spcPct val="135000"/>
+              </a:lnSpc>
+            </a:pPr>
+            <a:r>
+              <a:rPr sz="1500" b="1" i="0">
+                <a:solidFill>
+                  <a:srgbClr val="1D6B8F"/>
+                </a:solidFill>
+                <a:latin typeface="Verdana"/>
+              </a:rPr>
+              <a:t>4</a:t>
+            </a:r>
+          </a:p>
+        </p:txBody>
+      </p:sp>
+      <p:sp>
+        <p:nvSpPr>
+          <p:cNvPr id="23" name="TextBox 22"/>
+          <p:cNvSpPr txBox="1"/>
+          <p:nvPr/>
+        </p:nvSpPr>
+        <p:spPr>
+          <a:xfrm>
+            <a:off x="1344168" y="4358640"/>
+            <a:ext cx="10097719" cy="285496"/>
+          </a:xfrm>
+          <a:prstGeom prst="rect">
+            <a:avLst/>
+          </a:prstGeom>
+          <a:noFill/>
+        </p:spPr>
+        <p:txBody>
+          <a:bodyPr wrap="square" lIns="0" rIns="0" tIns="0" bIns="0" anchor="t">
+            <a:spAutoFit/>
+          </a:bodyPr>
+          <a:lstStyle/>
+          <a:p>
+            <a:pPr algn="l">
+              <a:lnSpc>
+                <a:spcPct val="140000"/>
+              </a:lnSpc>
+            </a:pPr>
+            <a:r>
+              <a:rPr sz="1400" b="0" i="0">
+                <a:solidFill>
+                  <a:srgbClr val="3A3D40"/>
+                </a:solidFill>
+                <a:latin typeface="Verdana"/>
+              </a:rPr>
+              <a:t>Dans quel cas peut-on refuser un travail ?   </a:t>
+            </a:r>
+            <a:r>
+              <a:rPr sz="1400" b="1" i="0">
+                <a:solidFill>
+                  <a:srgbClr val="07734A"/>
+                </a:solidFill>
+                <a:latin typeface="Verdana"/>
+              </a:rPr>
+              <a:t>» motif raisonnable de croire à un danger</a:t>
+            </a:r>
+          </a:p>
+        </p:txBody>
+      </p:sp>
+      <p:sp>
+        <p:nvSpPr>
+          <p:cNvPr id="24" name="Rounded Rectangle 23"/>
+          <p:cNvSpPr/>
+          <p:nvPr/>
+        </p:nvSpPr>
+        <p:spPr>
+          <a:xfrm>
+            <a:off x="566928" y="4891023"/>
+            <a:ext cx="11057839" cy="559816"/>
+          </a:xfrm>
+          <a:prstGeom prst="roundRect">
+            <a:avLst>
+              <a:gd name="adj" fmla="val 26134"/>
+            </a:avLst>
+          </a:prstGeom>
+          <a:solidFill>
+            <a:srgbClr val="E6F5EE"/>
+          </a:solidFill>
+          <a:ln w="12700">
+            <a:solidFill>
+              <a:srgbClr val="EAEAE8"/>
+            </a:solidFill>
+          </a:ln>
+          <a:effectLst/>
+        </p:spPr>
+        <p:style>
+          <a:lnRef idx="1">
+            <a:schemeClr val="accent1"/>
+          </a:lnRef>
+          <a:fillRef idx="3">
+            <a:schemeClr val="accent1"/>
+          </a:fillRef>
+          <a:effectRef idx="2">
+            <a:schemeClr val="accent1"/>
+          </a:effectRef>
+          <a:fontRef idx="minor">
+            <a:schemeClr val="lt1"/>
+          </a:fontRef>
+        </p:style>
+        <p:txBody>
+          <a:bodyPr rtlCol="0" anchor="ctr"/>
+          <a:lstStyle/>
+          <a:p/>
+        </p:txBody>
+      </p:sp>
+      <p:sp>
+        <p:nvSpPr>
+          <p:cNvPr id="25" name="Rounded Rectangle 24"/>
+          <p:cNvSpPr/>
+          <p:nvPr/>
+        </p:nvSpPr>
+        <p:spPr>
+          <a:xfrm>
+            <a:off x="841247" y="4988051"/>
+            <a:ext cx="365760" cy="365760"/>
+          </a:xfrm>
+          <a:prstGeom prst="roundRect">
+            <a:avLst>
+              <a:gd name="adj" fmla="val 32500"/>
+            </a:avLst>
+          </a:prstGeom>
+          <a:solidFill>
+            <a:srgbClr val="E7F0F6"/>
+          </a:solidFill>
+          <a:ln>
+            <a:noFill/>
+          </a:ln>
+          <a:effectLst/>
+        </p:spPr>
+        <p:style>
+          <a:lnRef idx="1">
+            <a:schemeClr val="accent1"/>
+          </a:lnRef>
+          <a:fillRef idx="3">
+            <a:schemeClr val="accent1"/>
+          </a:fillRef>
+          <a:effectRef idx="2">
+            <a:schemeClr val="accent1"/>
+          </a:effectRef>
+          <a:fontRef idx="minor">
+            <a:schemeClr val="lt1"/>
+          </a:fontRef>
+        </p:style>
+        <p:txBody>
+          <a:bodyPr rtlCol="0" anchor="ctr"/>
+          <a:lstStyle/>
+          <a:p/>
+        </p:txBody>
+      </p:sp>
+      <p:sp>
+        <p:nvSpPr>
+          <p:cNvPr id="26" name="TextBox 25"/>
+          <p:cNvSpPr txBox="1"/>
+          <p:nvPr/>
+        </p:nvSpPr>
+        <p:spPr>
+          <a:xfrm>
+            <a:off x="841247" y="5052059"/>
+            <a:ext cx="365760" cy="256032"/>
+          </a:xfrm>
+          <a:prstGeom prst="rect">
+            <a:avLst/>
+          </a:prstGeom>
+          <a:noFill/>
+        </p:spPr>
+        <p:txBody>
+          <a:bodyPr wrap="square" lIns="0" rIns="0" tIns="0" bIns="0" anchor="t">
+            <a:spAutoFit/>
+          </a:bodyPr>
+          <a:lstStyle/>
+          <a:p>
+            <a:pPr algn="ctr">
+              <a:lnSpc>
+                <a:spcPct val="135000"/>
+              </a:lnSpc>
+            </a:pPr>
+            <a:r>
+              <a:rPr sz="1500" b="1" i="0">
+                <a:solidFill>
+                  <a:srgbClr val="1D6B8F"/>
+                </a:solidFill>
+                <a:latin typeface="Verdana"/>
+              </a:rPr>
+              <a:t>5</a:t>
+            </a:r>
+          </a:p>
+        </p:txBody>
+      </p:sp>
+      <p:sp>
+        <p:nvSpPr>
+          <p:cNvPr id="27" name="TextBox 26"/>
+          <p:cNvSpPr txBox="1"/>
+          <p:nvPr/>
+        </p:nvSpPr>
+        <p:spPr>
+          <a:xfrm>
+            <a:off x="1344168" y="5046471"/>
+            <a:ext cx="10097719" cy="285496"/>
+          </a:xfrm>
+          <a:prstGeom prst="rect">
+            <a:avLst/>
+          </a:prstGeom>
+          <a:noFill/>
+        </p:spPr>
+        <p:txBody>
+          <a:bodyPr wrap="square" lIns="0" rIns="0" tIns="0" bIns="0" anchor="t">
+            <a:spAutoFit/>
+          </a:bodyPr>
+          <a:lstStyle/>
+          <a:p>
+            <a:pPr algn="l">
+              <a:lnSpc>
+                <a:spcPct val="140000"/>
+              </a:lnSpc>
+            </a:pPr>
+            <a:r>
+              <a:rPr sz="1400" b="0" i="0">
+                <a:solidFill>
+                  <a:srgbClr val="3A3D40"/>
+                </a:solidFill>
+                <a:latin typeface="Verdana"/>
+              </a:rPr>
+              <a:t>Peut-on refuser si les conditions sont normales pour ce métier ?   </a:t>
+            </a:r>
+            <a:r>
+              <a:rPr sz="1400" b="1" i="0">
+                <a:solidFill>
+                  <a:srgbClr val="07734A"/>
+                </a:solidFill>
+                <a:latin typeface="Verdana"/>
+              </a:rPr>
+              <a:t>» non - article 13</a:t>
+            </a:r>
+          </a:p>
+        </p:txBody>
+      </p:sp>
+      <p:sp>
+        <p:nvSpPr>
+          <p:cNvPr id="28" name="Rounded Rectangle 27"/>
+          <p:cNvSpPr/>
+          <p:nvPr/>
+        </p:nvSpPr>
+        <p:spPr>
+          <a:xfrm>
+            <a:off x="566928" y="5578856"/>
+            <a:ext cx="11057839" cy="559816"/>
+          </a:xfrm>
+          <a:prstGeom prst="roundRect">
+            <a:avLst>
+              <a:gd name="adj" fmla="val 26134"/>
+            </a:avLst>
+          </a:prstGeom>
+          <a:solidFill>
+            <a:srgbClr val="E6F5EE"/>
+          </a:solidFill>
+          <a:ln w="12700">
+            <a:solidFill>
+              <a:srgbClr val="EAEAE8"/>
+            </a:solidFill>
+          </a:ln>
+          <a:effectLst/>
+        </p:spPr>
+        <p:style>
+          <a:lnRef idx="1">
+            <a:schemeClr val="accent1"/>
+          </a:lnRef>
+          <a:fillRef idx="3">
+            <a:schemeClr val="accent1"/>
+          </a:fillRef>
+          <a:effectRef idx="2">
+            <a:schemeClr val="accent1"/>
+          </a:effectRef>
+          <a:fontRef idx="minor">
+            <a:schemeClr val="lt1"/>
+          </a:fontRef>
+        </p:style>
+        <p:txBody>
+          <a:bodyPr rtlCol="0" anchor="ctr"/>
+          <a:lstStyle/>
+          <a:p/>
+        </p:txBody>
+      </p:sp>
+      <p:sp>
+        <p:nvSpPr>
+          <p:cNvPr id="29" name="Rounded Rectangle 28"/>
+          <p:cNvSpPr/>
+          <p:nvPr/>
+        </p:nvSpPr>
+        <p:spPr>
+          <a:xfrm>
+            <a:off x="841247" y="5675884"/>
+            <a:ext cx="365760" cy="365760"/>
+          </a:xfrm>
+          <a:prstGeom prst="roundRect">
+            <a:avLst>
+              <a:gd name="adj" fmla="val 32500"/>
+            </a:avLst>
+          </a:prstGeom>
+          <a:solidFill>
+            <a:srgbClr val="E7F0F6"/>
+          </a:solidFill>
+          <a:ln>
+            <a:noFill/>
+          </a:ln>
+          <a:effectLst/>
+        </p:spPr>
+        <p:style>
+          <a:lnRef idx="1">
+            <a:schemeClr val="accent1"/>
+          </a:lnRef>
+          <a:fillRef idx="3">
+            <a:schemeClr val="accent1"/>
+          </a:fillRef>
+          <a:effectRef idx="2">
+            <a:schemeClr val="accent1"/>
+          </a:effectRef>
+          <a:fontRef idx="minor">
+            <a:schemeClr val="lt1"/>
+          </a:fontRef>
+        </p:style>
+        <p:txBody>
+          <a:bodyPr rtlCol="0" anchor="ctr"/>
+          <a:lstStyle/>
+          <a:p/>
+        </p:txBody>
+      </p:sp>
+      <p:sp>
+        <p:nvSpPr>
+          <p:cNvPr id="30" name="TextBox 29"/>
+          <p:cNvSpPr txBox="1"/>
+          <p:nvPr/>
+        </p:nvSpPr>
+        <p:spPr>
+          <a:xfrm>
+            <a:off x="841247" y="5739892"/>
+            <a:ext cx="365760" cy="256032"/>
+          </a:xfrm>
+          <a:prstGeom prst="rect">
+            <a:avLst/>
+          </a:prstGeom>
+          <a:noFill/>
+        </p:spPr>
+        <p:txBody>
+          <a:bodyPr wrap="square" lIns="0" rIns="0" tIns="0" bIns="0" anchor="t">
+            <a:spAutoFit/>
+          </a:bodyPr>
+          <a:lstStyle/>
+          <a:p>
+            <a:pPr algn="ctr">
+              <a:lnSpc>
+                <a:spcPct val="135000"/>
+              </a:lnSpc>
+            </a:pPr>
+            <a:r>
+              <a:rPr sz="1500" b="1" i="0">
+                <a:solidFill>
+                  <a:srgbClr val="1D6B8F"/>
+                </a:solidFill>
+                <a:latin typeface="Verdana"/>
+              </a:rPr>
+              <a:t>6</a:t>
+            </a:r>
+          </a:p>
+        </p:txBody>
+      </p:sp>
+      <p:sp>
+        <p:nvSpPr>
+          <p:cNvPr id="31" name="TextBox 30"/>
+          <p:cNvSpPr txBox="1"/>
+          <p:nvPr/>
+        </p:nvSpPr>
+        <p:spPr>
+          <a:xfrm>
+            <a:off x="1344168" y="5734304"/>
+            <a:ext cx="10097719" cy="285496"/>
+          </a:xfrm>
+          <a:prstGeom prst="rect">
+            <a:avLst/>
+          </a:prstGeom>
+          <a:noFill/>
+        </p:spPr>
+        <p:txBody>
+          <a:bodyPr wrap="square" lIns="0" rIns="0" tIns="0" bIns="0" anchor="t">
+            <a:spAutoFit/>
+          </a:bodyPr>
+          <a:lstStyle/>
+          <a:p>
+            <a:pPr algn="l">
+              <a:lnSpc>
+                <a:spcPct val="140000"/>
+              </a:lnSpc>
+            </a:pPr>
+            <a:r>
+              <a:rPr sz="1400" b="0" i="0">
+                <a:solidFill>
+                  <a:srgbClr val="3A3D40"/>
+                </a:solidFill>
+                <a:latin typeface="Verdana"/>
+              </a:rPr>
+              <a:t>Qui tranche s'il y a désaccord sur le danger ?   </a:t>
+            </a:r>
+            <a:r>
+              <a:rPr sz="1400" b="1" i="0">
+                <a:solidFill>
+                  <a:srgbClr val="07734A"/>
+                </a:solidFill>
+                <a:latin typeface="Verdana"/>
+              </a:rPr>
+              <a:t>» l'inspecteur de la CNESST</a:t>
+            </a:r>
+          </a:p>
+        </p:txBody>
+      </p:sp>
+    </p:spTree>
+  </p:cSld>
+  <p:clrMapOvr>
+    <a:masterClrMapping/>
+  </p:clrMapOvr>
+</p:sld>
+</file>
+
+<file path=ppt/slides/slide12.xml><?xml version="1.0" encoding="utf-8"?>
+<p:sld xmlns:a="http://schemas.openxmlformats.org/drawingml/2006/main" xmlns:p="http://schemas.openxmlformats.org/presentationml/2006/main" xmlns:r="http://schemas.openxmlformats.org/officeDocument/2006/relationships">
+  <p:cSld>
+    <p:spTree>
+      <p:nvGrpSpPr>
+        <p:cNvPr id="1" name=""/>
+        <p:cNvGrpSpPr/>
+        <p:nvPr/>
+      </p:nvGrpSpPr>
+      <p:grpSpPr/>
+      <p:sp>
+        <p:nvSpPr>
+          <p:cNvPr id="2" name="Rectangle 1"/>
+          <p:cNvSpPr/>
+          <p:nvPr/>
+        </p:nvSpPr>
+        <p:spPr>
+          <a:xfrm>
+            <a:off x="0" y="0"/>
+            <a:ext cx="12191695" cy="6858000"/>
+          </a:xfrm>
+          <a:prstGeom prst="rect">
+            <a:avLst/>
+          </a:prstGeom>
+          <a:solidFill>
+            <a:srgbClr val="F7F7F5"/>
+          </a:solidFill>
+          <a:ln>
+            <a:noFill/>
+          </a:ln>
+          <a:effectLst/>
+        </p:spPr>
+        <p:style>
+          <a:lnRef idx="1">
+            <a:schemeClr val="accent1"/>
+          </a:lnRef>
+          <a:fillRef idx="3">
+            <a:schemeClr val="accent1"/>
+          </a:fillRef>
+          <a:effectRef idx="2">
+            <a:schemeClr val="accent1"/>
+          </a:effectRef>
+          <a:fontRef idx="minor">
+            <a:schemeClr val="lt1"/>
+          </a:fontRef>
+        </p:style>
+        <p:txBody>
+          <a:bodyPr rtlCol="0" anchor="ctr"/>
+          <a:lstStyle/>
+          <a:p/>
+        </p:txBody>
+      </p:sp>
+      <p:sp>
+        <p:nvSpPr>
+          <p:cNvPr id="3" name="TextBox 2"/>
+          <p:cNvSpPr txBox="1"/>
+          <p:nvPr/>
+        </p:nvSpPr>
+        <p:spPr>
+          <a:xfrm>
+            <a:off x="566928" y="6355080"/>
+            <a:ext cx="6400800" cy="219456"/>
+          </a:xfrm>
+          <a:prstGeom prst="rect">
+            <a:avLst/>
+          </a:prstGeom>
+          <a:noFill/>
+        </p:spPr>
+        <p:txBody>
+          <a:bodyPr wrap="square" lIns="0" rIns="0" tIns="0" bIns="0" anchor="t">
+            <a:spAutoFit/>
+          </a:bodyPr>
+          <a:lstStyle/>
+          <a:p>
+            <a:pPr algn="l">
+              <a:lnSpc>
+                <a:spcPct val="135000"/>
+              </a:lnSpc>
+            </a:pPr>
+            <a:r>
+              <a:rPr sz="1200" b="0" i="0">
+                <a:solidFill>
+                  <a:srgbClr val="6E7175"/>
+                </a:solidFill>
+                <a:latin typeface="Verdana"/>
+              </a:rPr>
+              <a:t>C4 · Présenter un projet au travail</a:t>
+            </a:r>
+          </a:p>
+        </p:txBody>
+      </p:sp>
+      <p:sp>
+        <p:nvSpPr>
+          <p:cNvPr id="4" name="TextBox 3"/>
+          <p:cNvSpPr txBox="1"/>
+          <p:nvPr/>
+        </p:nvSpPr>
+        <p:spPr>
+          <a:xfrm>
+            <a:off x="10710367" y="6355080"/>
+            <a:ext cx="914400" cy="219456"/>
+          </a:xfrm>
+          <a:prstGeom prst="rect">
+            <a:avLst/>
+          </a:prstGeom>
+          <a:noFill/>
+        </p:spPr>
+        <p:txBody>
+          <a:bodyPr wrap="square" lIns="0" rIns="0" tIns="0" bIns="0" anchor="t">
+            <a:spAutoFit/>
+          </a:bodyPr>
+          <a:lstStyle/>
+          <a:p>
+            <a:pPr algn="r">
+              <a:lnSpc>
+                <a:spcPct val="135000"/>
+              </a:lnSpc>
+            </a:pPr>
+            <a:r>
+              <a:rPr sz="1200" b="0" i="0">
+                <a:solidFill>
+                  <a:srgbClr val="6E7175"/>
+                </a:solidFill>
+                <a:latin typeface="Verdana"/>
+              </a:rPr>
+              <a:t>12</a:t>
+            </a:r>
+          </a:p>
+        </p:txBody>
+      </p:sp>
+      <p:sp>
+        <p:nvSpPr>
+          <p:cNvPr id="5" name="TextBox 4"/>
+          <p:cNvSpPr txBox="1"/>
+          <p:nvPr/>
+        </p:nvSpPr>
+        <p:spPr>
+          <a:xfrm>
+            <a:off x="566928" y="420624"/>
+            <a:ext cx="11057839" cy="237744"/>
+          </a:xfrm>
+          <a:prstGeom prst="rect">
+            <a:avLst/>
+          </a:prstGeom>
+          <a:noFill/>
+        </p:spPr>
+        <p:txBody>
+          <a:bodyPr wrap="square" lIns="0" rIns="0" tIns="0" bIns="0" anchor="t">
+            <a:spAutoFit/>
+          </a:bodyPr>
+          <a:lstStyle/>
+          <a:p>
+            <a:pPr algn="l">
+              <a:lnSpc>
+                <a:spcPct val="135000"/>
+              </a:lnSpc>
+            </a:pPr>
+            <a:r>
+              <a:rPr sz="1300" b="1" i="0" spc="156">
+                <a:solidFill>
+                  <a:srgbClr val="1D6B8F"/>
+                </a:solidFill>
+                <a:latin typeface="Verdana"/>
+              </a:rPr>
+              <a:t>COMPRÉHENSION</a:t>
+            </a:r>
+          </a:p>
+        </p:txBody>
+      </p:sp>
+      <p:sp>
+        <p:nvSpPr>
+          <p:cNvPr id="6" name="TextBox 5"/>
+          <p:cNvSpPr txBox="1"/>
+          <p:nvPr/>
+        </p:nvSpPr>
+        <p:spPr>
+          <a:xfrm>
+            <a:off x="566928" y="749808"/>
+            <a:ext cx="11057839" cy="877824"/>
+          </a:xfrm>
+          <a:prstGeom prst="rect">
+            <a:avLst/>
+          </a:prstGeom>
+          <a:noFill/>
+        </p:spPr>
+        <p:txBody>
+          <a:bodyPr wrap="square" lIns="0" rIns="0" tIns="0" bIns="0" anchor="t">
+            <a:spAutoFit/>
+          </a:bodyPr>
+          <a:lstStyle/>
+          <a:p>
+            <a:pPr algn="l">
+              <a:lnSpc>
+                <a:spcPct val="115000"/>
+              </a:lnSpc>
+            </a:pPr>
+            <a:r>
+              <a:rPr sz="3400" b="1" i="0">
+                <a:solidFill>
+                  <a:srgbClr val="17181A"/>
+                </a:solidFill>
+                <a:latin typeface="Verdana"/>
+              </a:rPr>
+              <a:t>Le piège le plus fréquent</a:t>
+            </a:r>
+          </a:p>
+        </p:txBody>
+      </p:sp>
+      <p:sp>
+        <p:nvSpPr>
+          <p:cNvPr id="7" name="Rounded Rectangle 6"/>
+          <p:cNvSpPr/>
+          <p:nvPr/>
+        </p:nvSpPr>
+        <p:spPr>
+          <a:xfrm>
+            <a:off x="566928" y="1856232"/>
+            <a:ext cx="5428335" cy="2331720"/>
+          </a:xfrm>
+          <a:prstGeom prst="roundRect">
+            <a:avLst>
+              <a:gd name="adj" fmla="val 6274"/>
+            </a:avLst>
+          </a:prstGeom>
+          <a:solidFill>
+            <a:srgbClr val="FFF6F5"/>
+          </a:solidFill>
+          <a:ln w="12700">
+            <a:solidFill>
+              <a:srgbClr val="DC2626"/>
+            </a:solidFill>
+          </a:ln>
+          <a:effectLst/>
+        </p:spPr>
+        <p:style>
+          <a:lnRef idx="1">
+            <a:schemeClr val="accent1"/>
+          </a:lnRef>
+          <a:fillRef idx="3">
+            <a:schemeClr val="accent1"/>
+          </a:fillRef>
+          <a:effectRef idx="2">
+            <a:schemeClr val="accent1"/>
+          </a:effectRef>
+          <a:fontRef idx="minor">
+            <a:schemeClr val="lt1"/>
+          </a:fontRef>
+        </p:style>
+        <p:txBody>
+          <a:bodyPr rtlCol="0" anchor="ctr"/>
+          <a:lstStyle/>
+          <a:p/>
+        </p:txBody>
+      </p:sp>
+      <p:sp>
+        <p:nvSpPr>
+          <p:cNvPr id="8" name="TextBox 7"/>
+          <p:cNvSpPr txBox="1"/>
+          <p:nvPr/>
+        </p:nvSpPr>
+        <p:spPr>
+          <a:xfrm>
+            <a:off x="932688" y="2130552"/>
+            <a:ext cx="4696815" cy="274320"/>
+          </a:xfrm>
+          <a:prstGeom prst="rect">
+            <a:avLst/>
+          </a:prstGeom>
+          <a:noFill/>
+        </p:spPr>
+        <p:txBody>
+          <a:bodyPr wrap="square" lIns="0" rIns="0" tIns="0" bIns="0" anchor="t">
+            <a:spAutoFit/>
+          </a:bodyPr>
+          <a:lstStyle/>
+          <a:p>
+            <a:pPr algn="l">
+              <a:lnSpc>
+                <a:spcPct val="135000"/>
+              </a:lnSpc>
+            </a:pPr>
+            <a:r>
+              <a:rPr sz="1300" b="1" i="0" spc="156">
+                <a:solidFill>
+                  <a:srgbClr val="B91C1C"/>
+                </a:solidFill>
+                <a:latin typeface="Verdana"/>
+              </a:rPr>
+              <a:t>ON ENTEND SOUVENT</a:t>
+            </a:r>
+          </a:p>
+        </p:txBody>
+      </p:sp>
+      <p:sp>
+        <p:nvSpPr>
+          <p:cNvPr id="9" name="TextBox 8"/>
+          <p:cNvSpPr txBox="1"/>
+          <p:nvPr/>
+        </p:nvSpPr>
+        <p:spPr>
+          <a:xfrm>
+            <a:off x="932688" y="2569464"/>
+            <a:ext cx="4696815" cy="1417320"/>
+          </a:xfrm>
+          <a:prstGeom prst="rect">
+            <a:avLst/>
+          </a:prstGeom>
+          <a:noFill/>
+        </p:spPr>
+        <p:txBody>
+          <a:bodyPr wrap="square" lIns="0" rIns="0" tIns="0" bIns="0" anchor="t">
+            <a:spAutoFit/>
+          </a:bodyPr>
+          <a:lstStyle/>
+          <a:p>
+            <a:pPr algn="l">
+              <a:lnSpc>
+                <a:spcPct val="130000"/>
+              </a:lnSpc>
+            </a:pPr>
+            <a:r>
+              <a:rPr sz="2500" b="1" i="0">
+                <a:solidFill>
+                  <a:srgbClr val="17181A"/>
+                </a:solidFill>
+                <a:latin typeface="Verdana"/>
+              </a:rPr>
+              <a:t>croire qu'une politique d'employeur est une loi</a:t>
+            </a:r>
+          </a:p>
+        </p:txBody>
+      </p:sp>
+      <p:sp>
+        <p:nvSpPr>
+          <p:cNvPr id="10" name="Rounded Rectangle 9"/>
+          <p:cNvSpPr/>
+          <p:nvPr/>
+        </p:nvSpPr>
+        <p:spPr>
+          <a:xfrm>
+            <a:off x="6196431" y="1856232"/>
+            <a:ext cx="5428335" cy="2331720"/>
+          </a:xfrm>
+          <a:prstGeom prst="roundRect">
+            <a:avLst>
+              <a:gd name="adj" fmla="val 6274"/>
+            </a:avLst>
+          </a:prstGeom>
+          <a:solidFill>
+            <a:srgbClr val="E6F5EE"/>
+          </a:solidFill>
+          <a:ln w="12700">
+            <a:solidFill>
+              <a:srgbClr val="0A8F5B"/>
+            </a:solidFill>
+          </a:ln>
+          <a:effectLst/>
+        </p:spPr>
+        <p:style>
+          <a:lnRef idx="1">
+            <a:schemeClr val="accent1"/>
+          </a:lnRef>
+          <a:fillRef idx="3">
+            <a:schemeClr val="accent1"/>
+          </a:fillRef>
+          <a:effectRef idx="2">
+            <a:schemeClr val="accent1"/>
+          </a:effectRef>
+          <a:fontRef idx="minor">
+            <a:schemeClr val="lt1"/>
+          </a:fontRef>
+        </p:style>
+        <p:txBody>
+          <a:bodyPr rtlCol="0" anchor="ctr"/>
+          <a:lstStyle/>
+          <a:p/>
+        </p:txBody>
+      </p:sp>
+      <p:sp>
+        <p:nvSpPr>
+          <p:cNvPr id="11" name="TextBox 10"/>
+          <p:cNvSpPr txBox="1"/>
+          <p:nvPr/>
+        </p:nvSpPr>
+        <p:spPr>
+          <a:xfrm>
+            <a:off x="6562191" y="2130552"/>
+            <a:ext cx="4696815" cy="274320"/>
+          </a:xfrm>
+          <a:prstGeom prst="rect">
+            <a:avLst/>
+          </a:prstGeom>
+          <a:noFill/>
+        </p:spPr>
+        <p:txBody>
+          <a:bodyPr wrap="square" lIns="0" rIns="0" tIns="0" bIns="0" anchor="t">
+            <a:spAutoFit/>
+          </a:bodyPr>
+          <a:lstStyle/>
+          <a:p>
+            <a:pPr algn="l">
+              <a:lnSpc>
+                <a:spcPct val="135000"/>
+              </a:lnSpc>
+            </a:pPr>
+            <a:r>
+              <a:rPr sz="1300" b="1" i="0" spc="156">
+                <a:solidFill>
+                  <a:srgbClr val="07734A"/>
+                </a:solidFill>
+                <a:latin typeface="Verdana"/>
+              </a:rPr>
+              <a:t>IL FAUT DIRE PLUTÔT</a:t>
+            </a:r>
+          </a:p>
+        </p:txBody>
+      </p:sp>
+      <p:sp>
+        <p:nvSpPr>
+          <p:cNvPr id="12" name="TextBox 11"/>
+          <p:cNvSpPr txBox="1"/>
+          <p:nvPr/>
+        </p:nvSpPr>
+        <p:spPr>
+          <a:xfrm>
+            <a:off x="6562191" y="2569464"/>
+            <a:ext cx="4696815" cy="1417320"/>
+          </a:xfrm>
+          <a:prstGeom prst="rect">
+            <a:avLst/>
+          </a:prstGeom>
+          <a:noFill/>
+        </p:spPr>
+        <p:txBody>
+          <a:bodyPr wrap="square" lIns="0" rIns="0" tIns="0" bIns="0" anchor="t">
+            <a:spAutoFit/>
+          </a:bodyPr>
+          <a:lstStyle/>
+          <a:p>
+            <a:pPr algn="l">
+              <a:lnSpc>
+                <a:spcPct val="130000"/>
+              </a:lnSpc>
+            </a:pPr>
+            <a:r>
+              <a:rPr sz="2500" b="1" i="0">
+                <a:solidFill>
+                  <a:srgbClr val="17181A"/>
+                </a:solidFill>
+                <a:latin typeface="Verdana"/>
+              </a:rPr>
+              <a:t>demander où c'est écrit</a:t>
+            </a:r>
+          </a:p>
+        </p:txBody>
+      </p:sp>
+      <p:sp>
+        <p:nvSpPr>
+          <p:cNvPr id="13" name="Rounded Rectangle 12"/>
+          <p:cNvSpPr/>
+          <p:nvPr/>
+        </p:nvSpPr>
+        <p:spPr>
+          <a:xfrm>
+            <a:off x="566928" y="4462272"/>
+            <a:ext cx="11057839" cy="1618487"/>
+          </a:xfrm>
+          <a:prstGeom prst="roundRect">
+            <a:avLst>
+              <a:gd name="adj" fmla="val 9039"/>
+            </a:avLst>
+          </a:prstGeom>
+          <a:solidFill>
+            <a:srgbClr val="FFFFFF"/>
+          </a:solidFill>
+          <a:ln w="12700">
+            <a:solidFill>
+              <a:srgbClr val="EAEAE8"/>
+            </a:solidFill>
+          </a:ln>
+          <a:effectLst/>
+        </p:spPr>
+        <p:style>
+          <a:lnRef idx="1">
+            <a:schemeClr val="accent1"/>
+          </a:lnRef>
+          <a:fillRef idx="3">
+            <a:schemeClr val="accent1"/>
+          </a:fillRef>
+          <a:effectRef idx="2">
+            <a:schemeClr val="accent1"/>
+          </a:effectRef>
+          <a:fontRef idx="minor">
+            <a:schemeClr val="lt1"/>
+          </a:fontRef>
+        </p:style>
+        <p:txBody>
+          <a:bodyPr rtlCol="0" anchor="ctr"/>
+          <a:lstStyle/>
+          <a:p/>
+        </p:txBody>
+      </p:sp>
+      <p:sp>
+        <p:nvSpPr>
+          <p:cNvPr id="14" name="TextBox 13"/>
+          <p:cNvSpPr txBox="1"/>
+          <p:nvPr/>
+        </p:nvSpPr>
+        <p:spPr>
+          <a:xfrm>
+            <a:off x="969264" y="4736592"/>
+            <a:ext cx="10234879" cy="1150620"/>
+          </a:xfrm>
+          <a:prstGeom prst="rect">
+            <a:avLst/>
+          </a:prstGeom>
+          <a:noFill/>
+        </p:spPr>
+        <p:txBody>
+          <a:bodyPr wrap="square" lIns="0" rIns="0" tIns="0" bIns="0" anchor="t">
+            <a:spAutoFit/>
+          </a:bodyPr>
+          <a:lstStyle/>
+          <a:p>
+            <a:pPr algn="l">
+              <a:lnSpc>
+                <a:spcPct val="145000"/>
+              </a:lnSpc>
+            </a:pPr>
+            <a:r>
+              <a:rPr sz="2000" b="0" i="0">
+                <a:solidFill>
+                  <a:srgbClr val="4B4F52"/>
+                </a:solidFill>
+                <a:latin typeface="Verdana"/>
+              </a:rPr>
+              <a:t>Une politique interne s'applique parce que l'employeur s'y engage. Elle peut être meilleure que la loi - jamais moins bonne. Savoir de quel texte vient une règle change tout : on négocie une politique, on n'en négocie pas une loi.</a:t>
+            </a:r>
+          </a:p>
+        </p:txBody>
+      </p:sp>
+    </p:spTree>
+  </p:cSld>
+  <p:clrMapOvr>
+    <a:masterClrMapping/>
+  </p:clrMapOvr>
+</p:sld>
+</file>
+
+<file path=ppt/slides/slide13.xml><?xml version="1.0" encoding="utf-8"?>
+<p:sld xmlns:a="http://schemas.openxmlformats.org/drawingml/2006/main" xmlns:p="http://schemas.openxmlformats.org/presentationml/2006/main" xmlns:r="http://schemas.openxmlformats.org/officeDocument/2006/relationships">
+  <p:cSld>
+    <p:spTree>
+      <p:nvGrpSpPr>
+        <p:cNvPr id="1" name=""/>
+        <p:cNvGrpSpPr/>
+        <p:nvPr/>
+      </p:nvGrpSpPr>
+      <p:grpSpPr/>
+      <p:sp>
+        <p:nvSpPr>
+          <p:cNvPr id="2" name="Rectangle 1"/>
+          <p:cNvSpPr/>
+          <p:nvPr/>
+        </p:nvSpPr>
+        <p:spPr>
+          <a:xfrm>
+            <a:off x="0" y="0"/>
+            <a:ext cx="12191695" cy="6858000"/>
+          </a:xfrm>
+          <a:prstGeom prst="rect">
+            <a:avLst/>
+          </a:prstGeom>
+          <a:solidFill>
+            <a:srgbClr val="F7F7F5"/>
+          </a:solidFill>
+          <a:ln>
+            <a:noFill/>
+          </a:ln>
+          <a:effectLst/>
+        </p:spPr>
+        <p:style>
+          <a:lnRef idx="1">
+            <a:schemeClr val="accent1"/>
+          </a:lnRef>
+          <a:fillRef idx="3">
+            <a:schemeClr val="accent1"/>
+          </a:fillRef>
+          <a:effectRef idx="2">
+            <a:schemeClr val="accent1"/>
+          </a:effectRef>
+          <a:fontRef idx="minor">
+            <a:schemeClr val="lt1"/>
+          </a:fontRef>
+        </p:style>
+        <p:txBody>
+          <a:bodyPr rtlCol="0" anchor="ctr"/>
+          <a:lstStyle/>
+          <a:p/>
+        </p:txBody>
+      </p:sp>
+      <p:sp>
+        <p:nvSpPr>
+          <p:cNvPr id="3" name="TextBox 2"/>
+          <p:cNvSpPr txBox="1"/>
+          <p:nvPr/>
+        </p:nvSpPr>
+        <p:spPr>
+          <a:xfrm>
+            <a:off x="566928" y="6355080"/>
+            <a:ext cx="6400800" cy="219456"/>
+          </a:xfrm>
+          <a:prstGeom prst="rect">
+            <a:avLst/>
+          </a:prstGeom>
+          <a:noFill/>
+        </p:spPr>
+        <p:txBody>
+          <a:bodyPr wrap="square" lIns="0" rIns="0" tIns="0" bIns="0" anchor="t">
+            <a:spAutoFit/>
+          </a:bodyPr>
+          <a:lstStyle/>
+          <a:p>
+            <a:pPr algn="l">
+              <a:lnSpc>
+                <a:spcPct val="135000"/>
+              </a:lnSpc>
+            </a:pPr>
+            <a:r>
+              <a:rPr sz="1200" b="0" i="0">
+                <a:solidFill>
+                  <a:srgbClr val="6E7175"/>
+                </a:solidFill>
+                <a:latin typeface="Verdana"/>
+              </a:rPr>
+              <a:t>C4 · Présenter un projet au travail</a:t>
+            </a:r>
+          </a:p>
+        </p:txBody>
+      </p:sp>
+      <p:sp>
+        <p:nvSpPr>
+          <p:cNvPr id="4" name="TextBox 3"/>
+          <p:cNvSpPr txBox="1"/>
+          <p:nvPr/>
+        </p:nvSpPr>
+        <p:spPr>
+          <a:xfrm>
+            <a:off x="10710367" y="6355080"/>
+            <a:ext cx="914400" cy="219456"/>
+          </a:xfrm>
+          <a:prstGeom prst="rect">
+            <a:avLst/>
+          </a:prstGeom>
+          <a:noFill/>
+        </p:spPr>
+        <p:txBody>
+          <a:bodyPr wrap="square" lIns="0" rIns="0" tIns="0" bIns="0" anchor="t">
+            <a:spAutoFit/>
+          </a:bodyPr>
+          <a:lstStyle/>
+          <a:p>
+            <a:pPr algn="r">
+              <a:lnSpc>
+                <a:spcPct val="135000"/>
+              </a:lnSpc>
+            </a:pPr>
+            <a:r>
+              <a:rPr sz="1200" b="0" i="0">
+                <a:solidFill>
+                  <a:srgbClr val="6E7175"/>
+                </a:solidFill>
+                <a:latin typeface="Verdana"/>
+              </a:rPr>
+              <a:t>13</a:t>
+            </a:r>
+          </a:p>
+        </p:txBody>
+      </p:sp>
+      <p:sp>
+        <p:nvSpPr>
           <p:cNvPr id="5" name="Rectangle 4"/>
           <p:cNvSpPr/>
           <p:nvPr/>
@@ -10436,7 +13158,7 @@
                 </a:solidFill>
                 <a:latin typeface="Verdana"/>
               </a:rPr>
-              <a:t>COMPRÉHENSION</a:t>
+              <a:t>LE DOCUMENT</a:t>
             </a:r>
           </a:p>
         </p:txBody>
@@ -10475,7 +13197,7 @@
                 </a:solidFill>
                 <a:latin typeface="Verdana"/>
               </a:rPr>
-              <a:t>Le programme de prévention et la loi</a:t>
+              <a:t>Le programme de prévention, et la loi</a:t>
             </a:r>
           </a:p>
         </p:txBody>
@@ -10488,8 +13210,8 @@
         </p:nvSpPr>
         <p:spPr>
           <a:xfrm>
-            <a:off x="566928" y="1645920"/>
-            <a:ext cx="11057839" cy="329184"/>
+            <a:off x="566928" y="1737360"/>
+            <a:ext cx="11057839" cy="630936"/>
           </a:xfrm>
           <a:prstGeom prst="rect">
             <a:avLst/>
@@ -10514,7 +13236,7 @@
                 </a:solidFill>
                 <a:latin typeface="Verdana"/>
               </a:rPr>
-              <a:t>Répondez d'après le document projeté au module.</a:t>
+              <a:t>Un extrait du document interne, puis deux articles de la loi. Les deux premiers blocs sont écrits par l'employeur ; les deux articles, non.</a:t>
             </a:r>
           </a:p>
         </p:txBody>
@@ -10527,12 +13249,12 @@
         </p:nvSpPr>
         <p:spPr>
           <a:xfrm>
-            <a:off x="566928" y="2139696"/>
-            <a:ext cx="11057839" cy="559816"/>
+            <a:off x="566928" y="2532888"/>
+            <a:ext cx="11057839" cy="3491865"/>
           </a:xfrm>
           <a:prstGeom prst="roundRect">
             <a:avLst>
-              <a:gd name="adj" fmla="val 26134"/>
+              <a:gd name="adj" fmla="val 4189"/>
             </a:avLst>
           </a:prstGeom>
           <a:solidFill>
@@ -10567,58 +13289,14 @@
       </p:sp>
       <p:sp>
         <p:nvSpPr>
-          <p:cNvPr id="9" name="Rounded Rectangle 8"/>
-          <p:cNvSpPr/>
-          <p:nvPr/>
-        </p:nvSpPr>
-        <p:spPr>
-          <a:xfrm>
-            <a:off x="841247" y="2236724"/>
-            <a:ext cx="365760" cy="365760"/>
-          </a:xfrm>
-          <a:prstGeom prst="roundRect">
-            <a:avLst>
-              <a:gd name="adj" fmla="val 32500"/>
-            </a:avLst>
-          </a:prstGeom>
-          <a:solidFill>
-            <a:srgbClr val="E7F0F6"/>
-          </a:solidFill>
-          <a:ln>
-            <a:noFill/>
-          </a:ln>
-          <a:effectLst/>
-        </p:spPr>
-        <p:style>
-          <a:lnRef idx="1">
-            <a:schemeClr val="accent1"/>
-          </a:lnRef>
-          <a:fillRef idx="3">
-            <a:schemeClr val="accent1"/>
-          </a:fillRef>
-          <a:effectRef idx="2">
-            <a:schemeClr val="accent1"/>
-          </a:effectRef>
-          <a:fontRef idx="minor">
-            <a:schemeClr val="lt1"/>
-          </a:fontRef>
-        </p:style>
-        <p:txBody>
-          <a:bodyPr rtlCol="0" anchor="ctr"/>
-          <a:lstStyle/>
-          <a:p/>
-        </p:txBody>
-      </p:sp>
-      <p:sp>
-        <p:nvSpPr>
-          <p:cNvPr id="10" name="TextBox 9"/>
+          <p:cNvPr id="9" name="TextBox 8"/>
           <p:cNvSpPr txBox="1"/>
           <p:nvPr/>
         </p:nvSpPr>
         <p:spPr>
           <a:xfrm>
-            <a:off x="841247" y="2300732"/>
-            <a:ext cx="365760" cy="256032"/>
+            <a:off x="978408" y="2788920"/>
+            <a:ext cx="10234879" cy="589026"/>
           </a:xfrm>
           <a:prstGeom prst="rect">
             <a:avLst/>
@@ -10631,33 +13309,33 @@
           </a:bodyPr>
           <a:lstStyle/>
           <a:p>
-            <a:pPr algn="ctr">
+            <a:pPr algn="l">
               <a:lnSpc>
-                <a:spcPct val="135000"/>
+                <a:spcPct val="145000"/>
               </a:lnSpc>
             </a:pPr>
             <a:r>
-              <a:rPr sz="1500" b="1" i="0">
-                <a:solidFill>
-                  <a:srgbClr val="1D6B8F"/>
-                </a:solidFill>
-                <a:latin typeface="Verdana"/>
-              </a:rPr>
-              <a:t>1</a:t>
-            </a:r>
-          </a:p>
-        </p:txBody>
-      </p:sp>
-      <p:sp>
-        <p:nvSpPr>
-          <p:cNvPr id="11" name="TextBox 10"/>
+              <a:rPr sz="1500" b="0" i="0">
+                <a:solidFill>
+                  <a:srgbClr val="3A3D40"/>
+                </a:solidFill>
+                <a:latin typeface="Verdana"/>
+              </a:rPr>
+              <a:t>PROGRAMME DE PRÉVENTION — MEUBLES RIVE-DU-NORD. Section 3 : manutention manuelle. Mise à jour du 14 janvier.</a:t>
+            </a:r>
+          </a:p>
+        </p:txBody>
+      </p:sp>
+      <p:sp>
+        <p:nvSpPr>
+          <p:cNvPr id="10" name="TextBox 9"/>
           <p:cNvSpPr txBox="1"/>
           <p:nvPr/>
         </p:nvSpPr>
         <p:spPr>
           <a:xfrm>
-            <a:off x="1344168" y="2295144"/>
-            <a:ext cx="10097719" cy="285496"/>
+            <a:off x="978408" y="3505962"/>
+            <a:ext cx="10234879" cy="865251"/>
           </a:xfrm>
           <a:prstGeom prst="rect">
             <a:avLst/>
@@ -10672,121 +13350,31 @@
           <a:p>
             <a:pPr algn="l">
               <a:lnSpc>
-                <a:spcPct val="140000"/>
+                <a:spcPct val="145000"/>
               </a:lnSpc>
             </a:pPr>
             <a:r>
-              <a:rPr sz="1400" b="0" i="0">
+              <a:rPr sz="1500" b="0" i="0">
                 <a:solidFill>
                   <a:srgbClr val="3A3D40"/>
                 </a:solidFill>
                 <a:latin typeface="Verdana"/>
               </a:rPr>
-              <a:t>À partir de combien de travailleurs un programme est-il obligatoire ?</a:t>
-            </a:r>
-          </a:p>
-        </p:txBody>
-      </p:sp>
-      <p:sp>
-        <p:nvSpPr>
-          <p:cNvPr id="12" name="Rounded Rectangle 11"/>
-          <p:cNvSpPr/>
-          <p:nvPr/>
-        </p:nvSpPr>
-        <p:spPr>
-          <a:xfrm>
-            <a:off x="566928" y="2827528"/>
-            <a:ext cx="11057839" cy="559816"/>
-          </a:xfrm>
-          <a:prstGeom prst="roundRect">
-            <a:avLst>
-              <a:gd name="adj" fmla="val 26134"/>
-            </a:avLst>
-          </a:prstGeom>
-          <a:solidFill>
-            <a:srgbClr val="FFFFFF"/>
-          </a:solidFill>
-          <a:ln w="12700">
-            <a:solidFill>
-              <a:srgbClr val="EAEAE8"/>
-            </a:solidFill>
-          </a:ln>
-          <a:effectLst/>
-        </p:spPr>
-        <p:style>
-          <a:lnRef idx="1">
-            <a:schemeClr val="accent1"/>
-          </a:lnRef>
-          <a:fillRef idx="3">
-            <a:schemeClr val="accent1"/>
-          </a:fillRef>
-          <a:effectRef idx="2">
-            <a:schemeClr val="accent1"/>
-          </a:effectRef>
-          <a:fontRef idx="minor">
-            <a:schemeClr val="lt1"/>
-          </a:fontRef>
-        </p:style>
-        <p:txBody>
-          <a:bodyPr rtlCol="0" anchor="ctr"/>
-          <a:lstStyle/>
-          <a:p/>
-        </p:txBody>
-      </p:sp>
-      <p:sp>
-        <p:nvSpPr>
-          <p:cNvPr id="13" name="Rounded Rectangle 12"/>
-          <p:cNvSpPr/>
-          <p:nvPr/>
-        </p:nvSpPr>
-        <p:spPr>
-          <a:xfrm>
-            <a:off x="841247" y="2924556"/>
-            <a:ext cx="365760" cy="365760"/>
-          </a:xfrm>
-          <a:prstGeom prst="roundRect">
-            <a:avLst>
-              <a:gd name="adj" fmla="val 32500"/>
-            </a:avLst>
-          </a:prstGeom>
-          <a:solidFill>
-            <a:srgbClr val="E7F0F6"/>
-          </a:solidFill>
-          <a:ln>
-            <a:noFill/>
-          </a:ln>
-          <a:effectLst/>
-        </p:spPr>
-        <p:style>
-          <a:lnRef idx="1">
-            <a:schemeClr val="accent1"/>
-          </a:lnRef>
-          <a:fillRef idx="3">
-            <a:schemeClr val="accent1"/>
-          </a:fillRef>
-          <a:effectRef idx="2">
-            <a:schemeClr val="accent1"/>
-          </a:effectRef>
-          <a:fontRef idx="minor">
-            <a:schemeClr val="lt1"/>
-          </a:fontRef>
-        </p:style>
-        <p:txBody>
-          <a:bodyPr rtlCol="0" anchor="ctr"/>
-          <a:lstStyle/>
-          <a:p/>
-        </p:txBody>
-      </p:sp>
-      <p:sp>
-        <p:nvSpPr>
-          <p:cNvPr id="14" name="TextBox 13"/>
+              <a:t>3.1 L'établissement comptant vingt travailleurs ou plus, il élabore, applique et met à jour annuellement un programme de prévention. La présente section porte sur les postes où des charges sont soulevées à la main.</a:t>
+            </a:r>
+          </a:p>
+        </p:txBody>
+      </p:sp>
+      <p:sp>
+        <p:nvSpPr>
+          <p:cNvPr id="11" name="TextBox 10"/>
           <p:cNvSpPr txBox="1"/>
           <p:nvPr/>
         </p:nvSpPr>
         <p:spPr>
           <a:xfrm>
-            <a:off x="841247" y="2988564"/>
-            <a:ext cx="365760" cy="256032"/>
+            <a:off x="978408" y="4499229"/>
+            <a:ext cx="10234879" cy="589026"/>
           </a:xfrm>
           <a:prstGeom prst="rect">
             <a:avLst/>
@@ -10799,33 +13387,33 @@
           </a:bodyPr>
           <a:lstStyle/>
           <a:p>
-            <a:pPr algn="ctr">
+            <a:pPr algn="l">
               <a:lnSpc>
-                <a:spcPct val="135000"/>
+                <a:spcPct val="145000"/>
               </a:lnSpc>
             </a:pPr>
             <a:r>
-              <a:rPr sz="1500" b="1" i="0">
-                <a:solidFill>
-                  <a:srgbClr val="1D6B8F"/>
-                </a:solidFill>
-                <a:latin typeface="Verdana"/>
-              </a:rPr>
-              <a:t>2</a:t>
-            </a:r>
-          </a:p>
-        </p:txBody>
-      </p:sp>
-      <p:sp>
-        <p:nvSpPr>
-          <p:cNvPr id="15" name="TextBox 14"/>
+              <a:rPr sz="1500" b="0" i="0">
+                <a:solidFill>
+                  <a:srgbClr val="3A3D40"/>
+                </a:solidFill>
+                <a:latin typeface="Verdana"/>
+              </a:rPr>
+              <a:t>3.2 Sont visés les postes 3, 4 et 7. Le risque retenu est la manutention répétitive de charges prises sous la hauteur des genoux.</a:t>
+            </a:r>
+          </a:p>
+        </p:txBody>
+      </p:sp>
+      <p:sp>
+        <p:nvSpPr>
+          <p:cNvPr id="12" name="TextBox 11"/>
           <p:cNvSpPr txBox="1"/>
           <p:nvPr/>
         </p:nvSpPr>
         <p:spPr>
           <a:xfrm>
-            <a:off x="1344168" y="2982975"/>
-            <a:ext cx="10097719" cy="285496"/>
+            <a:off x="978408" y="5216271"/>
+            <a:ext cx="10234879" cy="589026"/>
           </a:xfrm>
           <a:prstGeom prst="rect">
             <a:avLst/>
@@ -10840,689 +13428,17 @@
           <a:p>
             <a:pPr algn="l">
               <a:lnSpc>
-                <a:spcPct val="140000"/>
+                <a:spcPct val="145000"/>
               </a:lnSpc>
             </a:pPr>
             <a:r>
-              <a:rPr sz="1400" b="0" i="0">
+              <a:rPr sz="1500" b="0" i="0">
                 <a:solidFill>
                   <a:srgbClr val="3A3D40"/>
                 </a:solidFill>
                 <a:latin typeface="Verdana"/>
               </a:rPr>
-              <a:t>À quelle fréquence se met-il à jour ?</a:t>
-            </a:r>
-          </a:p>
-        </p:txBody>
-      </p:sp>
-      <p:sp>
-        <p:nvSpPr>
-          <p:cNvPr id="16" name="Rounded Rectangle 15"/>
-          <p:cNvSpPr/>
-          <p:nvPr/>
-        </p:nvSpPr>
-        <p:spPr>
-          <a:xfrm>
-            <a:off x="566928" y="3515359"/>
-            <a:ext cx="11057839" cy="559816"/>
-          </a:xfrm>
-          <a:prstGeom prst="roundRect">
-            <a:avLst>
-              <a:gd name="adj" fmla="val 26134"/>
-            </a:avLst>
-          </a:prstGeom>
-          <a:solidFill>
-            <a:srgbClr val="FFFFFF"/>
-          </a:solidFill>
-          <a:ln w="12700">
-            <a:solidFill>
-              <a:srgbClr val="EAEAE8"/>
-            </a:solidFill>
-          </a:ln>
-          <a:effectLst/>
-        </p:spPr>
-        <p:style>
-          <a:lnRef idx="1">
-            <a:schemeClr val="accent1"/>
-          </a:lnRef>
-          <a:fillRef idx="3">
-            <a:schemeClr val="accent1"/>
-          </a:fillRef>
-          <a:effectRef idx="2">
-            <a:schemeClr val="accent1"/>
-          </a:effectRef>
-          <a:fontRef idx="minor">
-            <a:schemeClr val="lt1"/>
-          </a:fontRef>
-        </p:style>
-        <p:txBody>
-          <a:bodyPr rtlCol="0" anchor="ctr"/>
-          <a:lstStyle/>
-          <a:p/>
-        </p:txBody>
-      </p:sp>
-      <p:sp>
-        <p:nvSpPr>
-          <p:cNvPr id="17" name="Rounded Rectangle 16"/>
-          <p:cNvSpPr/>
-          <p:nvPr/>
-        </p:nvSpPr>
-        <p:spPr>
-          <a:xfrm>
-            <a:off x="841247" y="3612388"/>
-            <a:ext cx="365760" cy="365760"/>
-          </a:xfrm>
-          <a:prstGeom prst="roundRect">
-            <a:avLst>
-              <a:gd name="adj" fmla="val 32500"/>
-            </a:avLst>
-          </a:prstGeom>
-          <a:solidFill>
-            <a:srgbClr val="E7F0F6"/>
-          </a:solidFill>
-          <a:ln>
-            <a:noFill/>
-          </a:ln>
-          <a:effectLst/>
-        </p:spPr>
-        <p:style>
-          <a:lnRef idx="1">
-            <a:schemeClr val="accent1"/>
-          </a:lnRef>
-          <a:fillRef idx="3">
-            <a:schemeClr val="accent1"/>
-          </a:fillRef>
-          <a:effectRef idx="2">
-            <a:schemeClr val="accent1"/>
-          </a:effectRef>
-          <a:fontRef idx="minor">
-            <a:schemeClr val="lt1"/>
-          </a:fontRef>
-        </p:style>
-        <p:txBody>
-          <a:bodyPr rtlCol="0" anchor="ctr"/>
-          <a:lstStyle/>
-          <a:p/>
-        </p:txBody>
-      </p:sp>
-      <p:sp>
-        <p:nvSpPr>
-          <p:cNvPr id="18" name="TextBox 17"/>
-          <p:cNvSpPr txBox="1"/>
-          <p:nvPr/>
-        </p:nvSpPr>
-        <p:spPr>
-          <a:xfrm>
-            <a:off x="841247" y="3676395"/>
-            <a:ext cx="365760" cy="256032"/>
-          </a:xfrm>
-          <a:prstGeom prst="rect">
-            <a:avLst/>
-          </a:prstGeom>
-          <a:noFill/>
-        </p:spPr>
-        <p:txBody>
-          <a:bodyPr wrap="square" lIns="0" rIns="0" tIns="0" bIns="0" anchor="t">
-            <a:spAutoFit/>
-          </a:bodyPr>
-          <a:lstStyle/>
-          <a:p>
-            <a:pPr algn="ctr">
-              <a:lnSpc>
-                <a:spcPct val="135000"/>
-              </a:lnSpc>
-            </a:pPr>
-            <a:r>
-              <a:rPr sz="1500" b="1" i="0">
-                <a:solidFill>
-                  <a:srgbClr val="1D6B8F"/>
-                </a:solidFill>
-                <a:latin typeface="Verdana"/>
-              </a:rPr>
-              <a:t>3</a:t>
-            </a:r>
-          </a:p>
-        </p:txBody>
-      </p:sp>
-      <p:sp>
-        <p:nvSpPr>
-          <p:cNvPr id="19" name="TextBox 18"/>
-          <p:cNvSpPr txBox="1"/>
-          <p:nvPr/>
-        </p:nvSpPr>
-        <p:spPr>
-          <a:xfrm>
-            <a:off x="1344168" y="3670807"/>
-            <a:ext cx="10097719" cy="285496"/>
-          </a:xfrm>
-          <a:prstGeom prst="rect">
-            <a:avLst/>
-          </a:prstGeom>
-          <a:noFill/>
-        </p:spPr>
-        <p:txBody>
-          <a:bodyPr wrap="square" lIns="0" rIns="0" tIns="0" bIns="0" anchor="t">
-            <a:spAutoFit/>
-          </a:bodyPr>
-          <a:lstStyle/>
-          <a:p>
-            <a:pPr algn="l">
-              <a:lnSpc>
-                <a:spcPct val="140000"/>
-              </a:lnSpc>
-            </a:pPr>
-            <a:r>
-              <a:rPr sz="1400" b="0" i="0">
-                <a:solidFill>
-                  <a:srgbClr val="3A3D40"/>
-                </a:solidFill>
-                <a:latin typeface="Verdana"/>
-              </a:rPr>
-              <a:t>Qui élit le représentant en santé et en sécurité ?</a:t>
-            </a:r>
-          </a:p>
-        </p:txBody>
-      </p:sp>
-      <p:sp>
-        <p:nvSpPr>
-          <p:cNvPr id="20" name="Rounded Rectangle 19"/>
-          <p:cNvSpPr/>
-          <p:nvPr/>
-        </p:nvSpPr>
-        <p:spPr>
-          <a:xfrm>
-            <a:off x="566928" y="4203192"/>
-            <a:ext cx="11057839" cy="559816"/>
-          </a:xfrm>
-          <a:prstGeom prst="roundRect">
-            <a:avLst>
-              <a:gd name="adj" fmla="val 26134"/>
-            </a:avLst>
-          </a:prstGeom>
-          <a:solidFill>
-            <a:srgbClr val="FFFFFF"/>
-          </a:solidFill>
-          <a:ln w="12700">
-            <a:solidFill>
-              <a:srgbClr val="EAEAE8"/>
-            </a:solidFill>
-          </a:ln>
-          <a:effectLst/>
-        </p:spPr>
-        <p:style>
-          <a:lnRef idx="1">
-            <a:schemeClr val="accent1"/>
-          </a:lnRef>
-          <a:fillRef idx="3">
-            <a:schemeClr val="accent1"/>
-          </a:fillRef>
-          <a:effectRef idx="2">
-            <a:schemeClr val="accent1"/>
-          </a:effectRef>
-          <a:fontRef idx="minor">
-            <a:schemeClr val="lt1"/>
-          </a:fontRef>
-        </p:style>
-        <p:txBody>
-          <a:bodyPr rtlCol="0" anchor="ctr"/>
-          <a:lstStyle/>
-          <a:p/>
-        </p:txBody>
-      </p:sp>
-      <p:sp>
-        <p:nvSpPr>
-          <p:cNvPr id="21" name="Rounded Rectangle 20"/>
-          <p:cNvSpPr/>
-          <p:nvPr/>
-        </p:nvSpPr>
-        <p:spPr>
-          <a:xfrm>
-            <a:off x="841247" y="4300220"/>
-            <a:ext cx="365760" cy="365760"/>
-          </a:xfrm>
-          <a:prstGeom prst="roundRect">
-            <a:avLst>
-              <a:gd name="adj" fmla="val 32500"/>
-            </a:avLst>
-          </a:prstGeom>
-          <a:solidFill>
-            <a:srgbClr val="E7F0F6"/>
-          </a:solidFill>
-          <a:ln>
-            <a:noFill/>
-          </a:ln>
-          <a:effectLst/>
-        </p:spPr>
-        <p:style>
-          <a:lnRef idx="1">
-            <a:schemeClr val="accent1"/>
-          </a:lnRef>
-          <a:fillRef idx="3">
-            <a:schemeClr val="accent1"/>
-          </a:fillRef>
-          <a:effectRef idx="2">
-            <a:schemeClr val="accent1"/>
-          </a:effectRef>
-          <a:fontRef idx="minor">
-            <a:schemeClr val="lt1"/>
-          </a:fontRef>
-        </p:style>
-        <p:txBody>
-          <a:bodyPr rtlCol="0" anchor="ctr"/>
-          <a:lstStyle/>
-          <a:p/>
-        </p:txBody>
-      </p:sp>
-      <p:sp>
-        <p:nvSpPr>
-          <p:cNvPr id="22" name="TextBox 21"/>
-          <p:cNvSpPr txBox="1"/>
-          <p:nvPr/>
-        </p:nvSpPr>
-        <p:spPr>
-          <a:xfrm>
-            <a:off x="841247" y="4364228"/>
-            <a:ext cx="365760" cy="256032"/>
-          </a:xfrm>
-          <a:prstGeom prst="rect">
-            <a:avLst/>
-          </a:prstGeom>
-          <a:noFill/>
-        </p:spPr>
-        <p:txBody>
-          <a:bodyPr wrap="square" lIns="0" rIns="0" tIns="0" bIns="0" anchor="t">
-            <a:spAutoFit/>
-          </a:bodyPr>
-          <a:lstStyle/>
-          <a:p>
-            <a:pPr algn="ctr">
-              <a:lnSpc>
-                <a:spcPct val="135000"/>
-              </a:lnSpc>
-            </a:pPr>
-            <a:r>
-              <a:rPr sz="1500" b="1" i="0">
-                <a:solidFill>
-                  <a:srgbClr val="1D6B8F"/>
-                </a:solidFill>
-                <a:latin typeface="Verdana"/>
-              </a:rPr>
-              <a:t>4</a:t>
-            </a:r>
-          </a:p>
-        </p:txBody>
-      </p:sp>
-      <p:sp>
-        <p:nvSpPr>
-          <p:cNvPr id="23" name="TextBox 22"/>
-          <p:cNvSpPr txBox="1"/>
-          <p:nvPr/>
-        </p:nvSpPr>
-        <p:spPr>
-          <a:xfrm>
-            <a:off x="1344168" y="4358640"/>
-            <a:ext cx="10097719" cy="285496"/>
-          </a:xfrm>
-          <a:prstGeom prst="rect">
-            <a:avLst/>
-          </a:prstGeom>
-          <a:noFill/>
-        </p:spPr>
-        <p:txBody>
-          <a:bodyPr wrap="square" lIns="0" rIns="0" tIns="0" bIns="0" anchor="t">
-            <a:spAutoFit/>
-          </a:bodyPr>
-          <a:lstStyle/>
-          <a:p>
-            <a:pPr algn="l">
-              <a:lnSpc>
-                <a:spcPct val="140000"/>
-              </a:lnSpc>
-            </a:pPr>
-            <a:r>
-              <a:rPr sz="1400" b="0" i="0">
-                <a:solidFill>
-                  <a:srgbClr val="3A3D40"/>
-                </a:solidFill>
-                <a:latin typeface="Verdana"/>
-              </a:rPr>
-              <a:t>Dans quel cas peut-on refuser un travail ?</a:t>
-            </a:r>
-          </a:p>
-        </p:txBody>
-      </p:sp>
-      <p:sp>
-        <p:nvSpPr>
-          <p:cNvPr id="24" name="Rounded Rectangle 23"/>
-          <p:cNvSpPr/>
-          <p:nvPr/>
-        </p:nvSpPr>
-        <p:spPr>
-          <a:xfrm>
-            <a:off x="566928" y="4891023"/>
-            <a:ext cx="11057839" cy="559816"/>
-          </a:xfrm>
-          <a:prstGeom prst="roundRect">
-            <a:avLst>
-              <a:gd name="adj" fmla="val 26134"/>
-            </a:avLst>
-          </a:prstGeom>
-          <a:solidFill>
-            <a:srgbClr val="FFFFFF"/>
-          </a:solidFill>
-          <a:ln w="12700">
-            <a:solidFill>
-              <a:srgbClr val="EAEAE8"/>
-            </a:solidFill>
-          </a:ln>
-          <a:effectLst/>
-        </p:spPr>
-        <p:style>
-          <a:lnRef idx="1">
-            <a:schemeClr val="accent1"/>
-          </a:lnRef>
-          <a:fillRef idx="3">
-            <a:schemeClr val="accent1"/>
-          </a:fillRef>
-          <a:effectRef idx="2">
-            <a:schemeClr val="accent1"/>
-          </a:effectRef>
-          <a:fontRef idx="minor">
-            <a:schemeClr val="lt1"/>
-          </a:fontRef>
-        </p:style>
-        <p:txBody>
-          <a:bodyPr rtlCol="0" anchor="ctr"/>
-          <a:lstStyle/>
-          <a:p/>
-        </p:txBody>
-      </p:sp>
-      <p:sp>
-        <p:nvSpPr>
-          <p:cNvPr id="25" name="Rounded Rectangle 24"/>
-          <p:cNvSpPr/>
-          <p:nvPr/>
-        </p:nvSpPr>
-        <p:spPr>
-          <a:xfrm>
-            <a:off x="841247" y="4988051"/>
-            <a:ext cx="365760" cy="365760"/>
-          </a:xfrm>
-          <a:prstGeom prst="roundRect">
-            <a:avLst>
-              <a:gd name="adj" fmla="val 32500"/>
-            </a:avLst>
-          </a:prstGeom>
-          <a:solidFill>
-            <a:srgbClr val="E7F0F6"/>
-          </a:solidFill>
-          <a:ln>
-            <a:noFill/>
-          </a:ln>
-          <a:effectLst/>
-        </p:spPr>
-        <p:style>
-          <a:lnRef idx="1">
-            <a:schemeClr val="accent1"/>
-          </a:lnRef>
-          <a:fillRef idx="3">
-            <a:schemeClr val="accent1"/>
-          </a:fillRef>
-          <a:effectRef idx="2">
-            <a:schemeClr val="accent1"/>
-          </a:effectRef>
-          <a:fontRef idx="minor">
-            <a:schemeClr val="lt1"/>
-          </a:fontRef>
-        </p:style>
-        <p:txBody>
-          <a:bodyPr rtlCol="0" anchor="ctr"/>
-          <a:lstStyle/>
-          <a:p/>
-        </p:txBody>
-      </p:sp>
-      <p:sp>
-        <p:nvSpPr>
-          <p:cNvPr id="26" name="TextBox 25"/>
-          <p:cNvSpPr txBox="1"/>
-          <p:nvPr/>
-        </p:nvSpPr>
-        <p:spPr>
-          <a:xfrm>
-            <a:off x="841247" y="5052059"/>
-            <a:ext cx="365760" cy="256032"/>
-          </a:xfrm>
-          <a:prstGeom prst="rect">
-            <a:avLst/>
-          </a:prstGeom>
-          <a:noFill/>
-        </p:spPr>
-        <p:txBody>
-          <a:bodyPr wrap="square" lIns="0" rIns="0" tIns="0" bIns="0" anchor="t">
-            <a:spAutoFit/>
-          </a:bodyPr>
-          <a:lstStyle/>
-          <a:p>
-            <a:pPr algn="ctr">
-              <a:lnSpc>
-                <a:spcPct val="135000"/>
-              </a:lnSpc>
-            </a:pPr>
-            <a:r>
-              <a:rPr sz="1500" b="1" i="0">
-                <a:solidFill>
-                  <a:srgbClr val="1D6B8F"/>
-                </a:solidFill>
-                <a:latin typeface="Verdana"/>
-              </a:rPr>
-              <a:t>5</a:t>
-            </a:r>
-          </a:p>
-        </p:txBody>
-      </p:sp>
-      <p:sp>
-        <p:nvSpPr>
-          <p:cNvPr id="27" name="TextBox 26"/>
-          <p:cNvSpPr txBox="1"/>
-          <p:nvPr/>
-        </p:nvSpPr>
-        <p:spPr>
-          <a:xfrm>
-            <a:off x="1344168" y="5046471"/>
-            <a:ext cx="10097719" cy="285496"/>
-          </a:xfrm>
-          <a:prstGeom prst="rect">
-            <a:avLst/>
-          </a:prstGeom>
-          <a:noFill/>
-        </p:spPr>
-        <p:txBody>
-          <a:bodyPr wrap="square" lIns="0" rIns="0" tIns="0" bIns="0" anchor="t">
-            <a:spAutoFit/>
-          </a:bodyPr>
-          <a:lstStyle/>
-          <a:p>
-            <a:pPr algn="l">
-              <a:lnSpc>
-                <a:spcPct val="140000"/>
-              </a:lnSpc>
-            </a:pPr>
-            <a:r>
-              <a:rPr sz="1400" b="0" i="0">
-                <a:solidFill>
-                  <a:srgbClr val="3A3D40"/>
-                </a:solidFill>
-                <a:latin typeface="Verdana"/>
-              </a:rPr>
-              <a:t>Peut-on refuser si les conditions sont normales pour ce métier ?</a:t>
-            </a:r>
-          </a:p>
-        </p:txBody>
-      </p:sp>
-      <p:sp>
-        <p:nvSpPr>
-          <p:cNvPr id="28" name="Rounded Rectangle 27"/>
-          <p:cNvSpPr/>
-          <p:nvPr/>
-        </p:nvSpPr>
-        <p:spPr>
-          <a:xfrm>
-            <a:off x="566928" y="5578856"/>
-            <a:ext cx="11057839" cy="559816"/>
-          </a:xfrm>
-          <a:prstGeom prst="roundRect">
-            <a:avLst>
-              <a:gd name="adj" fmla="val 26134"/>
-            </a:avLst>
-          </a:prstGeom>
-          <a:solidFill>
-            <a:srgbClr val="FFFFFF"/>
-          </a:solidFill>
-          <a:ln w="12700">
-            <a:solidFill>
-              <a:srgbClr val="EAEAE8"/>
-            </a:solidFill>
-          </a:ln>
-          <a:effectLst/>
-        </p:spPr>
-        <p:style>
-          <a:lnRef idx="1">
-            <a:schemeClr val="accent1"/>
-          </a:lnRef>
-          <a:fillRef idx="3">
-            <a:schemeClr val="accent1"/>
-          </a:fillRef>
-          <a:effectRef idx="2">
-            <a:schemeClr val="accent1"/>
-          </a:effectRef>
-          <a:fontRef idx="minor">
-            <a:schemeClr val="lt1"/>
-          </a:fontRef>
-        </p:style>
-        <p:txBody>
-          <a:bodyPr rtlCol="0" anchor="ctr"/>
-          <a:lstStyle/>
-          <a:p/>
-        </p:txBody>
-      </p:sp>
-      <p:sp>
-        <p:nvSpPr>
-          <p:cNvPr id="29" name="Rounded Rectangle 28"/>
-          <p:cNvSpPr/>
-          <p:nvPr/>
-        </p:nvSpPr>
-        <p:spPr>
-          <a:xfrm>
-            <a:off x="841247" y="5675884"/>
-            <a:ext cx="365760" cy="365760"/>
-          </a:xfrm>
-          <a:prstGeom prst="roundRect">
-            <a:avLst>
-              <a:gd name="adj" fmla="val 32500"/>
-            </a:avLst>
-          </a:prstGeom>
-          <a:solidFill>
-            <a:srgbClr val="E7F0F6"/>
-          </a:solidFill>
-          <a:ln>
-            <a:noFill/>
-          </a:ln>
-          <a:effectLst/>
-        </p:spPr>
-        <p:style>
-          <a:lnRef idx="1">
-            <a:schemeClr val="accent1"/>
-          </a:lnRef>
-          <a:fillRef idx="3">
-            <a:schemeClr val="accent1"/>
-          </a:fillRef>
-          <a:effectRef idx="2">
-            <a:schemeClr val="accent1"/>
-          </a:effectRef>
-          <a:fontRef idx="minor">
-            <a:schemeClr val="lt1"/>
-          </a:fontRef>
-        </p:style>
-        <p:txBody>
-          <a:bodyPr rtlCol="0" anchor="ctr"/>
-          <a:lstStyle/>
-          <a:p/>
-        </p:txBody>
-      </p:sp>
-      <p:sp>
-        <p:nvSpPr>
-          <p:cNvPr id="30" name="TextBox 29"/>
-          <p:cNvSpPr txBox="1"/>
-          <p:nvPr/>
-        </p:nvSpPr>
-        <p:spPr>
-          <a:xfrm>
-            <a:off x="841247" y="5739892"/>
-            <a:ext cx="365760" cy="256032"/>
-          </a:xfrm>
-          <a:prstGeom prst="rect">
-            <a:avLst/>
-          </a:prstGeom>
-          <a:noFill/>
-        </p:spPr>
-        <p:txBody>
-          <a:bodyPr wrap="square" lIns="0" rIns="0" tIns="0" bIns="0" anchor="t">
-            <a:spAutoFit/>
-          </a:bodyPr>
-          <a:lstStyle/>
-          <a:p>
-            <a:pPr algn="ctr">
-              <a:lnSpc>
-                <a:spcPct val="135000"/>
-              </a:lnSpc>
-            </a:pPr>
-            <a:r>
-              <a:rPr sz="1500" b="1" i="0">
-                <a:solidFill>
-                  <a:srgbClr val="1D6B8F"/>
-                </a:solidFill>
-                <a:latin typeface="Verdana"/>
-              </a:rPr>
-              <a:t>6</a:t>
-            </a:r>
-          </a:p>
-        </p:txBody>
-      </p:sp>
-      <p:sp>
-        <p:nvSpPr>
-          <p:cNvPr id="31" name="TextBox 30"/>
-          <p:cNvSpPr txBox="1"/>
-          <p:nvPr/>
-        </p:nvSpPr>
-        <p:spPr>
-          <a:xfrm>
-            <a:off x="1344168" y="5734304"/>
-            <a:ext cx="10097719" cy="285496"/>
-          </a:xfrm>
-          <a:prstGeom prst="rect">
-            <a:avLst/>
-          </a:prstGeom>
-          <a:noFill/>
-        </p:spPr>
-        <p:txBody>
-          <a:bodyPr wrap="square" lIns="0" rIns="0" tIns="0" bIns="0" anchor="t">
-            <a:spAutoFit/>
-          </a:bodyPr>
-          <a:lstStyle/>
-          <a:p>
-            <a:pPr algn="l">
-              <a:lnSpc>
-                <a:spcPct val="140000"/>
-              </a:lnSpc>
-            </a:pPr>
-            <a:r>
-              <a:rPr sz="1400" b="0" i="0">
-                <a:solidFill>
-                  <a:srgbClr val="3A3D40"/>
-                </a:solidFill>
-                <a:latin typeface="Verdana"/>
-              </a:rPr>
-              <a:t>Qui tranche s'il y a désaccord sur le danger ?</a:t>
+              <a:t>3.3 Mesures retenues : réduire le nombre de flexions par quart, maintenir la charge entre la hauteur des genoux et celle des épaules, et former le personnel aux techniques de levage.</a:t>
             </a:r>
           </a:p>
         </p:txBody>
@@ -11699,7 +13615,7 @@
                 </a:solidFill>
                 <a:latin typeface="Verdana"/>
               </a:rPr>
-              <a:t>CORRECTION</a:t>
+              <a:t>LE DOCUMENT</a:t>
             </a:r>
           </a:p>
         </p:txBody>
@@ -11732,74 +13648,35 @@
               </a:lnSpc>
             </a:pPr>
             <a:r>
-              <a:rPr sz="3400" b="1" i="0">
+              <a:rPr sz="3300" b="1" i="0">
                 <a:solidFill>
                   <a:srgbClr val="17181A"/>
                 </a:solidFill>
                 <a:latin typeface="Verdana"/>
               </a:rPr>
-              <a:t>Le programme de prévention et la loi</a:t>
-            </a:r>
-          </a:p>
-        </p:txBody>
-      </p:sp>
-      <p:sp>
-        <p:nvSpPr>
-          <p:cNvPr id="7" name="TextBox 6"/>
-          <p:cNvSpPr txBox="1"/>
-          <p:nvPr/>
-        </p:nvSpPr>
-        <p:spPr>
-          <a:xfrm>
-            <a:off x="566928" y="1645920"/>
-            <a:ext cx="11057839" cy="329184"/>
-          </a:xfrm>
-          <a:prstGeom prst="rect">
-            <a:avLst/>
-          </a:prstGeom>
-          <a:noFill/>
-        </p:spPr>
-        <p:txBody>
-          <a:bodyPr wrap="square" lIns="0" rIns="0" tIns="0" bIns="0" anchor="t">
-            <a:spAutoFit/>
-          </a:bodyPr>
-          <a:lstStyle/>
-          <a:p>
-            <a:pPr algn="l">
-              <a:lnSpc>
-                <a:spcPct val="135000"/>
-              </a:lnSpc>
-            </a:pPr>
-            <a:r>
-              <a:rPr sz="1800" b="0" i="0">
-                <a:solidFill>
-                  <a:srgbClr val="6E7175"/>
-                </a:solidFill>
-                <a:latin typeface="Verdana"/>
-              </a:rPr>
-              <a:t>Correction — on lit la réponse, on ne commente pas l'erreur.</a:t>
-            </a:r>
-          </a:p>
-        </p:txBody>
-      </p:sp>
-      <p:sp>
-        <p:nvSpPr>
-          <p:cNvPr id="8" name="Rounded Rectangle 7"/>
+              <a:t>Le programme de prévention, et la loi (suite)</a:t>
+            </a:r>
+          </a:p>
+        </p:txBody>
+      </p:sp>
+      <p:sp>
+        <p:nvSpPr>
+          <p:cNvPr id="7" name="Rounded Rectangle 6"/>
           <p:cNvSpPr/>
           <p:nvPr/>
         </p:nvSpPr>
         <p:spPr>
           <a:xfrm>
-            <a:off x="566928" y="2139696"/>
-            <a:ext cx="11057839" cy="559816"/>
+            <a:off x="566928" y="1737360"/>
+            <a:ext cx="11057839" cy="4208907"/>
           </a:xfrm>
           <a:prstGeom prst="roundRect">
             <a:avLst>
-              <a:gd name="adj" fmla="val 26134"/>
+              <a:gd name="adj" fmla="val 3476"/>
             </a:avLst>
           </a:prstGeom>
           <a:solidFill>
-            <a:srgbClr val="E6F5EE"/>
+            <a:srgbClr val="FFFFFF"/>
           </a:solidFill>
           <a:ln w="12700">
             <a:solidFill>
@@ -11830,58 +13707,14 @@
       </p:sp>
       <p:sp>
         <p:nvSpPr>
-          <p:cNvPr id="9" name="Rounded Rectangle 8"/>
-          <p:cNvSpPr/>
-          <p:nvPr/>
-        </p:nvSpPr>
-        <p:spPr>
-          <a:xfrm>
-            <a:off x="841247" y="2236724"/>
-            <a:ext cx="365760" cy="365760"/>
-          </a:xfrm>
-          <a:prstGeom prst="roundRect">
-            <a:avLst>
-              <a:gd name="adj" fmla="val 32500"/>
-            </a:avLst>
-          </a:prstGeom>
-          <a:solidFill>
-            <a:srgbClr val="E7F0F6"/>
-          </a:solidFill>
-          <a:ln>
-            <a:noFill/>
-          </a:ln>
-          <a:effectLst/>
-        </p:spPr>
-        <p:style>
-          <a:lnRef idx="1">
-            <a:schemeClr val="accent1"/>
-          </a:lnRef>
-          <a:fillRef idx="3">
-            <a:schemeClr val="accent1"/>
-          </a:fillRef>
-          <a:effectRef idx="2">
-            <a:schemeClr val="accent1"/>
-          </a:effectRef>
-          <a:fontRef idx="minor">
-            <a:schemeClr val="lt1"/>
-          </a:fontRef>
-        </p:style>
-        <p:txBody>
-          <a:bodyPr rtlCol="0" anchor="ctr"/>
-          <a:lstStyle/>
-          <a:p/>
-        </p:txBody>
-      </p:sp>
-      <p:sp>
-        <p:nvSpPr>
-          <p:cNvPr id="10" name="TextBox 9"/>
+          <p:cNvPr id="8" name="TextBox 7"/>
           <p:cNvSpPr txBox="1"/>
           <p:nvPr/>
         </p:nvSpPr>
         <p:spPr>
           <a:xfrm>
-            <a:off x="841247" y="2300732"/>
-            <a:ext cx="365760" cy="256032"/>
+            <a:off x="978408" y="1993391"/>
+            <a:ext cx="10234879" cy="589026"/>
           </a:xfrm>
           <a:prstGeom prst="rect">
             <a:avLst/>
@@ -11894,33 +13727,33 @@
           </a:bodyPr>
           <a:lstStyle/>
           <a:p>
-            <a:pPr algn="ctr">
+            <a:pPr algn="l">
               <a:lnSpc>
-                <a:spcPct val="135000"/>
+                <a:spcPct val="145000"/>
               </a:lnSpc>
             </a:pPr>
             <a:r>
-              <a:rPr sz="1500" b="1" i="0">
-                <a:solidFill>
-                  <a:srgbClr val="1D6B8F"/>
-                </a:solidFill>
-                <a:latin typeface="Verdana"/>
-              </a:rPr>
-              <a:t>1</a:t>
-            </a:r>
-          </a:p>
-        </p:txBody>
-      </p:sp>
-      <p:sp>
-        <p:nvSpPr>
-          <p:cNvPr id="11" name="TextBox 10"/>
+              <a:rPr sz="1500" b="0" i="0">
+                <a:solidFill>
+                  <a:srgbClr val="3A3D40"/>
+                </a:solidFill>
+                <a:latin typeface="Verdana"/>
+              </a:rPr>
+              <a:t>3.4 Le comité de santé et de sécurité se réunit quatre fois par année. Au moins la moitié de ses membres, dont la représentante en santé et en sécurité, représentent les travailleurs.</a:t>
+            </a:r>
+          </a:p>
+        </p:txBody>
+      </p:sp>
+      <p:sp>
+        <p:nvSpPr>
+          <p:cNvPr id="9" name="TextBox 8"/>
           <p:cNvSpPr txBox="1"/>
           <p:nvPr/>
         </p:nvSpPr>
         <p:spPr>
           <a:xfrm>
-            <a:off x="1344168" y="2295144"/>
-            <a:ext cx="10097719" cy="285496"/>
+            <a:off x="978408" y="2710433"/>
+            <a:ext cx="10234879" cy="312800"/>
           </a:xfrm>
           <a:prstGeom prst="rect">
             <a:avLst/>
@@ -11935,130 +13768,31 @@
           <a:p>
             <a:pPr algn="l">
               <a:lnSpc>
-                <a:spcPct val="140000"/>
+                <a:spcPct val="145000"/>
               </a:lnSpc>
             </a:pPr>
             <a:r>
-              <a:rPr sz="1400" b="0" i="0">
+              <a:rPr sz="1500" b="0" i="0">
                 <a:solidFill>
                   <a:srgbClr val="3A3D40"/>
                 </a:solidFill>
                 <a:latin typeface="Verdana"/>
               </a:rPr>
-              <a:t>À partir de combien de travailleurs un programme est-il obligatoire ?   </a:t>
-            </a:r>
-            <a:r>
-              <a:rPr sz="1400" b="1" i="0">
-                <a:solidFill>
-                  <a:srgbClr val="07734A"/>
-                </a:solidFill>
-                <a:latin typeface="Verdana"/>
-              </a:rPr>
-              <a:t>» vingt</a:t>
-            </a:r>
-          </a:p>
-        </p:txBody>
-      </p:sp>
-      <p:sp>
-        <p:nvSpPr>
-          <p:cNvPr id="12" name="Rounded Rectangle 11"/>
-          <p:cNvSpPr/>
-          <p:nvPr/>
-        </p:nvSpPr>
-        <p:spPr>
-          <a:xfrm>
-            <a:off x="566928" y="2827528"/>
-            <a:ext cx="11057839" cy="559816"/>
-          </a:xfrm>
-          <a:prstGeom prst="roundRect">
-            <a:avLst>
-              <a:gd name="adj" fmla="val 26134"/>
-            </a:avLst>
-          </a:prstGeom>
-          <a:solidFill>
-            <a:srgbClr val="E6F5EE"/>
-          </a:solidFill>
-          <a:ln w="12700">
-            <a:solidFill>
-              <a:srgbClr val="EAEAE8"/>
-            </a:solidFill>
-          </a:ln>
-          <a:effectLst/>
-        </p:spPr>
-        <p:style>
-          <a:lnRef idx="1">
-            <a:schemeClr val="accent1"/>
-          </a:lnRef>
-          <a:fillRef idx="3">
-            <a:schemeClr val="accent1"/>
-          </a:fillRef>
-          <a:effectRef idx="2">
-            <a:schemeClr val="accent1"/>
-          </a:effectRef>
-          <a:fontRef idx="minor">
-            <a:schemeClr val="lt1"/>
-          </a:fontRef>
-        </p:style>
-        <p:txBody>
-          <a:bodyPr rtlCol="0" anchor="ctr"/>
-          <a:lstStyle/>
-          <a:p/>
-        </p:txBody>
-      </p:sp>
-      <p:sp>
-        <p:nvSpPr>
-          <p:cNvPr id="13" name="Rounded Rectangle 12"/>
-          <p:cNvSpPr/>
-          <p:nvPr/>
-        </p:nvSpPr>
-        <p:spPr>
-          <a:xfrm>
-            <a:off x="841247" y="2924556"/>
-            <a:ext cx="365760" cy="365760"/>
-          </a:xfrm>
-          <a:prstGeom prst="roundRect">
-            <a:avLst>
-              <a:gd name="adj" fmla="val 32500"/>
-            </a:avLst>
-          </a:prstGeom>
-          <a:solidFill>
-            <a:srgbClr val="E7F0F6"/>
-          </a:solidFill>
-          <a:ln>
-            <a:noFill/>
-          </a:ln>
-          <a:effectLst/>
-        </p:spPr>
-        <p:style>
-          <a:lnRef idx="1">
-            <a:schemeClr val="accent1"/>
-          </a:lnRef>
-          <a:fillRef idx="3">
-            <a:schemeClr val="accent1"/>
-          </a:fillRef>
-          <a:effectRef idx="2">
-            <a:schemeClr val="accent1"/>
-          </a:effectRef>
-          <a:fontRef idx="minor">
-            <a:schemeClr val="lt1"/>
-          </a:fontRef>
-        </p:style>
-        <p:txBody>
-          <a:bodyPr rtlCol="0" anchor="ctr"/>
-          <a:lstStyle/>
-          <a:p/>
-        </p:txBody>
-      </p:sp>
-      <p:sp>
-        <p:nvSpPr>
-          <p:cNvPr id="14" name="TextBox 13"/>
+              <a:t>LOI SUR LA SANTÉ ET LA SÉCURITÉ DU TRAVAIL — extraits.</a:t>
+            </a:r>
+          </a:p>
+        </p:txBody>
+      </p:sp>
+      <p:sp>
+        <p:nvSpPr>
+          <p:cNvPr id="10" name="TextBox 9"/>
           <p:cNvSpPr txBox="1"/>
           <p:nvPr/>
         </p:nvSpPr>
         <p:spPr>
           <a:xfrm>
-            <a:off x="841247" y="2988564"/>
-            <a:ext cx="365760" cy="256032"/>
+            <a:off x="978408" y="3151250"/>
+            <a:ext cx="10234879" cy="865251"/>
           </a:xfrm>
           <a:prstGeom prst="rect">
             <a:avLst/>
@@ -12071,33 +13805,33 @@
           </a:bodyPr>
           <a:lstStyle/>
           <a:p>
-            <a:pPr algn="ctr">
+            <a:pPr algn="l">
               <a:lnSpc>
-                <a:spcPct val="135000"/>
+                <a:spcPct val="145000"/>
               </a:lnSpc>
             </a:pPr>
             <a:r>
-              <a:rPr sz="1500" b="1" i="0">
-                <a:solidFill>
-                  <a:srgbClr val="1D6B8F"/>
-                </a:solidFill>
-                <a:latin typeface="Verdana"/>
-              </a:rPr>
-              <a:t>2</a:t>
-            </a:r>
-          </a:p>
-        </p:txBody>
-      </p:sp>
-      <p:sp>
-        <p:nvSpPr>
-          <p:cNvPr id="15" name="TextBox 14"/>
+              <a:rPr sz="1500" b="0" i="0">
+                <a:solidFill>
+                  <a:srgbClr val="3A3D40"/>
+                </a:solidFill>
+                <a:latin typeface="Verdana"/>
+              </a:rPr>
+              <a:t>Article 12. Un travailleur a le droit de refuser d'exécuter un travail s'il a des motifs raisonnables de croire que l'exécution de ce travail l'expose à un danger pour sa santé, sa sécurité ou son intégrité physique, ou peut avoir l'effet d'exposer une autre personne à un semblable danger.</a:t>
+            </a:r>
+          </a:p>
+        </p:txBody>
+      </p:sp>
+      <p:sp>
+        <p:nvSpPr>
+          <p:cNvPr id="11" name="TextBox 10"/>
           <p:cNvSpPr txBox="1"/>
           <p:nvPr/>
         </p:nvSpPr>
         <p:spPr>
           <a:xfrm>
-            <a:off x="1344168" y="2982975"/>
-            <a:ext cx="10097719" cy="285496"/>
+            <a:off x="978408" y="4144518"/>
+            <a:ext cx="10234879" cy="865251"/>
           </a:xfrm>
           <a:prstGeom prst="rect">
             <a:avLst/>
@@ -12112,130 +13846,31 @@
           <a:p>
             <a:pPr algn="l">
               <a:lnSpc>
-                <a:spcPct val="140000"/>
+                <a:spcPct val="145000"/>
               </a:lnSpc>
             </a:pPr>
             <a:r>
-              <a:rPr sz="1400" b="0" i="0">
+              <a:rPr sz="1500" b="0" i="0">
                 <a:solidFill>
                   <a:srgbClr val="3A3D40"/>
                 </a:solidFill>
                 <a:latin typeface="Verdana"/>
               </a:rPr>
-              <a:t>À quelle fréquence se met-il à jour ?   </a:t>
-            </a:r>
-            <a:r>
-              <a:rPr sz="1400" b="1" i="0">
-                <a:solidFill>
-                  <a:srgbClr val="07734A"/>
-                </a:solidFill>
-                <a:latin typeface="Verdana"/>
-              </a:rPr>
-              <a:t>» chaque année</a:t>
-            </a:r>
-          </a:p>
-        </p:txBody>
-      </p:sp>
-      <p:sp>
-        <p:nvSpPr>
-          <p:cNvPr id="16" name="Rounded Rectangle 15"/>
-          <p:cNvSpPr/>
-          <p:nvPr/>
-        </p:nvSpPr>
-        <p:spPr>
-          <a:xfrm>
-            <a:off x="566928" y="3515359"/>
-            <a:ext cx="11057839" cy="559816"/>
-          </a:xfrm>
-          <a:prstGeom prst="roundRect">
-            <a:avLst>
-              <a:gd name="adj" fmla="val 26134"/>
-            </a:avLst>
-          </a:prstGeom>
-          <a:solidFill>
-            <a:srgbClr val="E6F5EE"/>
-          </a:solidFill>
-          <a:ln w="12700">
-            <a:solidFill>
-              <a:srgbClr val="EAEAE8"/>
-            </a:solidFill>
-          </a:ln>
-          <a:effectLst/>
-        </p:spPr>
-        <p:style>
-          <a:lnRef idx="1">
-            <a:schemeClr val="accent1"/>
-          </a:lnRef>
-          <a:fillRef idx="3">
-            <a:schemeClr val="accent1"/>
-          </a:fillRef>
-          <a:effectRef idx="2">
-            <a:schemeClr val="accent1"/>
-          </a:effectRef>
-          <a:fontRef idx="minor">
-            <a:schemeClr val="lt1"/>
-          </a:fontRef>
-        </p:style>
-        <p:txBody>
-          <a:bodyPr rtlCol="0" anchor="ctr"/>
-          <a:lstStyle/>
-          <a:p/>
-        </p:txBody>
-      </p:sp>
-      <p:sp>
-        <p:nvSpPr>
-          <p:cNvPr id="17" name="Rounded Rectangle 16"/>
-          <p:cNvSpPr/>
-          <p:nvPr/>
-        </p:nvSpPr>
-        <p:spPr>
-          <a:xfrm>
-            <a:off x="841247" y="3612388"/>
-            <a:ext cx="365760" cy="365760"/>
-          </a:xfrm>
-          <a:prstGeom prst="roundRect">
-            <a:avLst>
-              <a:gd name="adj" fmla="val 32500"/>
-            </a:avLst>
-          </a:prstGeom>
-          <a:solidFill>
-            <a:srgbClr val="E7F0F6"/>
-          </a:solidFill>
-          <a:ln>
-            <a:noFill/>
-          </a:ln>
-          <a:effectLst/>
-        </p:spPr>
-        <p:style>
-          <a:lnRef idx="1">
-            <a:schemeClr val="accent1"/>
-          </a:lnRef>
-          <a:fillRef idx="3">
-            <a:schemeClr val="accent1"/>
-          </a:fillRef>
-          <a:effectRef idx="2">
-            <a:schemeClr val="accent1"/>
-          </a:effectRef>
-          <a:fontRef idx="minor">
-            <a:schemeClr val="lt1"/>
-          </a:fontRef>
-        </p:style>
-        <p:txBody>
-          <a:bodyPr rtlCol="0" anchor="ctr"/>
-          <a:lstStyle/>
-          <a:p/>
-        </p:txBody>
-      </p:sp>
-      <p:sp>
-        <p:nvSpPr>
-          <p:cNvPr id="18" name="TextBox 17"/>
+              <a:t>Article 13. Le travailleur ne peut cependant pas refuser si ce refus met en péril immédiat la vie, la santé, la sécurité ou l'intégrité physique d'une autre personne, ou si les conditions d'exécution de ce travail sont normales dans le genre de travail qu'il exerce.</a:t>
+            </a:r>
+          </a:p>
+        </p:txBody>
+      </p:sp>
+      <p:sp>
+        <p:nvSpPr>
+          <p:cNvPr id="12" name="TextBox 11"/>
           <p:cNvSpPr txBox="1"/>
           <p:nvPr/>
         </p:nvSpPr>
         <p:spPr>
           <a:xfrm>
-            <a:off x="841247" y="3676395"/>
-            <a:ext cx="365760" cy="256032"/>
+            <a:off x="978408" y="5137784"/>
+            <a:ext cx="10234879" cy="589026"/>
           </a:xfrm>
           <a:prstGeom prst="rect">
             <a:avLst/>
@@ -12248,598 +13883,19 @@
           </a:bodyPr>
           <a:lstStyle/>
           <a:p>
-            <a:pPr algn="ctr">
+            <a:pPr algn="l">
               <a:lnSpc>
-                <a:spcPct val="135000"/>
+                <a:spcPct val="145000"/>
               </a:lnSpc>
             </a:pPr>
             <a:r>
-              <a:rPr sz="1500" b="1" i="0">
-                <a:solidFill>
-                  <a:srgbClr val="1D6B8F"/>
-                </a:solidFill>
-                <a:latin typeface="Verdana"/>
-              </a:rPr>
-              <a:t>3</a:t>
-            </a:r>
-          </a:p>
-        </p:txBody>
-      </p:sp>
-      <p:sp>
-        <p:nvSpPr>
-          <p:cNvPr id="19" name="TextBox 18"/>
-          <p:cNvSpPr txBox="1"/>
-          <p:nvPr/>
-        </p:nvSpPr>
-        <p:spPr>
-          <a:xfrm>
-            <a:off x="1344168" y="3670807"/>
-            <a:ext cx="10097719" cy="285496"/>
-          </a:xfrm>
-          <a:prstGeom prst="rect">
-            <a:avLst/>
-          </a:prstGeom>
-          <a:noFill/>
-        </p:spPr>
-        <p:txBody>
-          <a:bodyPr wrap="square" lIns="0" rIns="0" tIns="0" bIns="0" anchor="t">
-            <a:spAutoFit/>
-          </a:bodyPr>
-          <a:lstStyle/>
-          <a:p>
-            <a:pPr algn="l">
-              <a:lnSpc>
-                <a:spcPct val="140000"/>
-              </a:lnSpc>
-            </a:pPr>
-            <a:r>
-              <a:rPr sz="1400" b="0" i="0">
+              <a:rPr sz="1500" b="0" i="0">
                 <a:solidFill>
                   <a:srgbClr val="3A3D40"/>
                 </a:solidFill>
                 <a:latin typeface="Verdana"/>
               </a:rPr>
-              <a:t>Qui élit le représentant en santé et en sécurité ?   </a:t>
-            </a:r>
-            <a:r>
-              <a:rPr sz="1400" b="1" i="0">
-                <a:solidFill>
-                  <a:srgbClr val="07734A"/>
-                </a:solidFill>
-                <a:latin typeface="Verdana"/>
-              </a:rPr>
-              <a:t>» les travailleurs</a:t>
-            </a:r>
-          </a:p>
-        </p:txBody>
-      </p:sp>
-      <p:sp>
-        <p:nvSpPr>
-          <p:cNvPr id="20" name="Rounded Rectangle 19"/>
-          <p:cNvSpPr/>
-          <p:nvPr/>
-        </p:nvSpPr>
-        <p:spPr>
-          <a:xfrm>
-            <a:off x="566928" y="4203192"/>
-            <a:ext cx="11057839" cy="559816"/>
-          </a:xfrm>
-          <a:prstGeom prst="roundRect">
-            <a:avLst>
-              <a:gd name="adj" fmla="val 26134"/>
-            </a:avLst>
-          </a:prstGeom>
-          <a:solidFill>
-            <a:srgbClr val="E6F5EE"/>
-          </a:solidFill>
-          <a:ln w="12700">
-            <a:solidFill>
-              <a:srgbClr val="EAEAE8"/>
-            </a:solidFill>
-          </a:ln>
-          <a:effectLst/>
-        </p:spPr>
-        <p:style>
-          <a:lnRef idx="1">
-            <a:schemeClr val="accent1"/>
-          </a:lnRef>
-          <a:fillRef idx="3">
-            <a:schemeClr val="accent1"/>
-          </a:fillRef>
-          <a:effectRef idx="2">
-            <a:schemeClr val="accent1"/>
-          </a:effectRef>
-          <a:fontRef idx="minor">
-            <a:schemeClr val="lt1"/>
-          </a:fontRef>
-        </p:style>
-        <p:txBody>
-          <a:bodyPr rtlCol="0" anchor="ctr"/>
-          <a:lstStyle/>
-          <a:p/>
-        </p:txBody>
-      </p:sp>
-      <p:sp>
-        <p:nvSpPr>
-          <p:cNvPr id="21" name="Rounded Rectangle 20"/>
-          <p:cNvSpPr/>
-          <p:nvPr/>
-        </p:nvSpPr>
-        <p:spPr>
-          <a:xfrm>
-            <a:off x="841247" y="4300220"/>
-            <a:ext cx="365760" cy="365760"/>
-          </a:xfrm>
-          <a:prstGeom prst="roundRect">
-            <a:avLst>
-              <a:gd name="adj" fmla="val 32500"/>
-            </a:avLst>
-          </a:prstGeom>
-          <a:solidFill>
-            <a:srgbClr val="E7F0F6"/>
-          </a:solidFill>
-          <a:ln>
-            <a:noFill/>
-          </a:ln>
-          <a:effectLst/>
-        </p:spPr>
-        <p:style>
-          <a:lnRef idx="1">
-            <a:schemeClr val="accent1"/>
-          </a:lnRef>
-          <a:fillRef idx="3">
-            <a:schemeClr val="accent1"/>
-          </a:fillRef>
-          <a:effectRef idx="2">
-            <a:schemeClr val="accent1"/>
-          </a:effectRef>
-          <a:fontRef idx="minor">
-            <a:schemeClr val="lt1"/>
-          </a:fontRef>
-        </p:style>
-        <p:txBody>
-          <a:bodyPr rtlCol="0" anchor="ctr"/>
-          <a:lstStyle/>
-          <a:p/>
-        </p:txBody>
-      </p:sp>
-      <p:sp>
-        <p:nvSpPr>
-          <p:cNvPr id="22" name="TextBox 21"/>
-          <p:cNvSpPr txBox="1"/>
-          <p:nvPr/>
-        </p:nvSpPr>
-        <p:spPr>
-          <a:xfrm>
-            <a:off x="841247" y="4364228"/>
-            <a:ext cx="365760" cy="256032"/>
-          </a:xfrm>
-          <a:prstGeom prst="rect">
-            <a:avLst/>
-          </a:prstGeom>
-          <a:noFill/>
-        </p:spPr>
-        <p:txBody>
-          <a:bodyPr wrap="square" lIns="0" rIns="0" tIns="0" bIns="0" anchor="t">
-            <a:spAutoFit/>
-          </a:bodyPr>
-          <a:lstStyle/>
-          <a:p>
-            <a:pPr algn="ctr">
-              <a:lnSpc>
-                <a:spcPct val="135000"/>
-              </a:lnSpc>
-            </a:pPr>
-            <a:r>
-              <a:rPr sz="1500" b="1" i="0">
-                <a:solidFill>
-                  <a:srgbClr val="1D6B8F"/>
-                </a:solidFill>
-                <a:latin typeface="Verdana"/>
-              </a:rPr>
-              <a:t>4</a:t>
-            </a:r>
-          </a:p>
-        </p:txBody>
-      </p:sp>
-      <p:sp>
-        <p:nvSpPr>
-          <p:cNvPr id="23" name="TextBox 22"/>
-          <p:cNvSpPr txBox="1"/>
-          <p:nvPr/>
-        </p:nvSpPr>
-        <p:spPr>
-          <a:xfrm>
-            <a:off x="1344168" y="4358640"/>
-            <a:ext cx="10097719" cy="285496"/>
-          </a:xfrm>
-          <a:prstGeom prst="rect">
-            <a:avLst/>
-          </a:prstGeom>
-          <a:noFill/>
-        </p:spPr>
-        <p:txBody>
-          <a:bodyPr wrap="square" lIns="0" rIns="0" tIns="0" bIns="0" anchor="t">
-            <a:spAutoFit/>
-          </a:bodyPr>
-          <a:lstStyle/>
-          <a:p>
-            <a:pPr algn="l">
-              <a:lnSpc>
-                <a:spcPct val="140000"/>
-              </a:lnSpc>
-            </a:pPr>
-            <a:r>
-              <a:rPr sz="1400" b="0" i="0">
-                <a:solidFill>
-                  <a:srgbClr val="3A3D40"/>
-                </a:solidFill>
-                <a:latin typeface="Verdana"/>
-              </a:rPr>
-              <a:t>Dans quel cas peut-on refuser un travail ?   </a:t>
-            </a:r>
-            <a:r>
-              <a:rPr sz="1400" b="1" i="0">
-                <a:solidFill>
-                  <a:srgbClr val="07734A"/>
-                </a:solidFill>
-                <a:latin typeface="Verdana"/>
-              </a:rPr>
-              <a:t>» motif raisonnable de croire à un danger</a:t>
-            </a:r>
-          </a:p>
-        </p:txBody>
-      </p:sp>
-      <p:sp>
-        <p:nvSpPr>
-          <p:cNvPr id="24" name="Rounded Rectangle 23"/>
-          <p:cNvSpPr/>
-          <p:nvPr/>
-        </p:nvSpPr>
-        <p:spPr>
-          <a:xfrm>
-            <a:off x="566928" y="4891023"/>
-            <a:ext cx="11057839" cy="559816"/>
-          </a:xfrm>
-          <a:prstGeom prst="roundRect">
-            <a:avLst>
-              <a:gd name="adj" fmla="val 26134"/>
-            </a:avLst>
-          </a:prstGeom>
-          <a:solidFill>
-            <a:srgbClr val="E6F5EE"/>
-          </a:solidFill>
-          <a:ln w="12700">
-            <a:solidFill>
-              <a:srgbClr val="EAEAE8"/>
-            </a:solidFill>
-          </a:ln>
-          <a:effectLst/>
-        </p:spPr>
-        <p:style>
-          <a:lnRef idx="1">
-            <a:schemeClr val="accent1"/>
-          </a:lnRef>
-          <a:fillRef idx="3">
-            <a:schemeClr val="accent1"/>
-          </a:fillRef>
-          <a:effectRef idx="2">
-            <a:schemeClr val="accent1"/>
-          </a:effectRef>
-          <a:fontRef idx="minor">
-            <a:schemeClr val="lt1"/>
-          </a:fontRef>
-        </p:style>
-        <p:txBody>
-          <a:bodyPr rtlCol="0" anchor="ctr"/>
-          <a:lstStyle/>
-          <a:p/>
-        </p:txBody>
-      </p:sp>
-      <p:sp>
-        <p:nvSpPr>
-          <p:cNvPr id="25" name="Rounded Rectangle 24"/>
-          <p:cNvSpPr/>
-          <p:nvPr/>
-        </p:nvSpPr>
-        <p:spPr>
-          <a:xfrm>
-            <a:off x="841247" y="4988051"/>
-            <a:ext cx="365760" cy="365760"/>
-          </a:xfrm>
-          <a:prstGeom prst="roundRect">
-            <a:avLst>
-              <a:gd name="adj" fmla="val 32500"/>
-            </a:avLst>
-          </a:prstGeom>
-          <a:solidFill>
-            <a:srgbClr val="E7F0F6"/>
-          </a:solidFill>
-          <a:ln>
-            <a:noFill/>
-          </a:ln>
-          <a:effectLst/>
-        </p:spPr>
-        <p:style>
-          <a:lnRef idx="1">
-            <a:schemeClr val="accent1"/>
-          </a:lnRef>
-          <a:fillRef idx="3">
-            <a:schemeClr val="accent1"/>
-          </a:fillRef>
-          <a:effectRef idx="2">
-            <a:schemeClr val="accent1"/>
-          </a:effectRef>
-          <a:fontRef idx="minor">
-            <a:schemeClr val="lt1"/>
-          </a:fontRef>
-        </p:style>
-        <p:txBody>
-          <a:bodyPr rtlCol="0" anchor="ctr"/>
-          <a:lstStyle/>
-          <a:p/>
-        </p:txBody>
-      </p:sp>
-      <p:sp>
-        <p:nvSpPr>
-          <p:cNvPr id="26" name="TextBox 25"/>
-          <p:cNvSpPr txBox="1"/>
-          <p:nvPr/>
-        </p:nvSpPr>
-        <p:spPr>
-          <a:xfrm>
-            <a:off x="841247" y="5052059"/>
-            <a:ext cx="365760" cy="256032"/>
-          </a:xfrm>
-          <a:prstGeom prst="rect">
-            <a:avLst/>
-          </a:prstGeom>
-          <a:noFill/>
-        </p:spPr>
-        <p:txBody>
-          <a:bodyPr wrap="square" lIns="0" rIns="0" tIns="0" bIns="0" anchor="t">
-            <a:spAutoFit/>
-          </a:bodyPr>
-          <a:lstStyle/>
-          <a:p>
-            <a:pPr algn="ctr">
-              <a:lnSpc>
-                <a:spcPct val="135000"/>
-              </a:lnSpc>
-            </a:pPr>
-            <a:r>
-              <a:rPr sz="1500" b="1" i="0">
-                <a:solidFill>
-                  <a:srgbClr val="1D6B8F"/>
-                </a:solidFill>
-                <a:latin typeface="Verdana"/>
-              </a:rPr>
-              <a:t>5</a:t>
-            </a:r>
-          </a:p>
-        </p:txBody>
-      </p:sp>
-      <p:sp>
-        <p:nvSpPr>
-          <p:cNvPr id="27" name="TextBox 26"/>
-          <p:cNvSpPr txBox="1"/>
-          <p:nvPr/>
-        </p:nvSpPr>
-        <p:spPr>
-          <a:xfrm>
-            <a:off x="1344168" y="5046471"/>
-            <a:ext cx="10097719" cy="285496"/>
-          </a:xfrm>
-          <a:prstGeom prst="rect">
-            <a:avLst/>
-          </a:prstGeom>
-          <a:noFill/>
-        </p:spPr>
-        <p:txBody>
-          <a:bodyPr wrap="square" lIns="0" rIns="0" tIns="0" bIns="0" anchor="t">
-            <a:spAutoFit/>
-          </a:bodyPr>
-          <a:lstStyle/>
-          <a:p>
-            <a:pPr algn="l">
-              <a:lnSpc>
-                <a:spcPct val="140000"/>
-              </a:lnSpc>
-            </a:pPr>
-            <a:r>
-              <a:rPr sz="1400" b="0" i="0">
-                <a:solidFill>
-                  <a:srgbClr val="3A3D40"/>
-                </a:solidFill>
-                <a:latin typeface="Verdana"/>
-              </a:rPr>
-              <a:t>Peut-on refuser si les conditions sont normales pour ce métier ?   </a:t>
-            </a:r>
-            <a:r>
-              <a:rPr sz="1400" b="1" i="0">
-                <a:solidFill>
-                  <a:srgbClr val="07734A"/>
-                </a:solidFill>
-                <a:latin typeface="Verdana"/>
-              </a:rPr>
-              <a:t>» non - article 13</a:t>
-            </a:r>
-          </a:p>
-        </p:txBody>
-      </p:sp>
-      <p:sp>
-        <p:nvSpPr>
-          <p:cNvPr id="28" name="Rounded Rectangle 27"/>
-          <p:cNvSpPr/>
-          <p:nvPr/>
-        </p:nvSpPr>
-        <p:spPr>
-          <a:xfrm>
-            <a:off x="566928" y="5578856"/>
-            <a:ext cx="11057839" cy="559816"/>
-          </a:xfrm>
-          <a:prstGeom prst="roundRect">
-            <a:avLst>
-              <a:gd name="adj" fmla="val 26134"/>
-            </a:avLst>
-          </a:prstGeom>
-          <a:solidFill>
-            <a:srgbClr val="E6F5EE"/>
-          </a:solidFill>
-          <a:ln w="12700">
-            <a:solidFill>
-              <a:srgbClr val="EAEAE8"/>
-            </a:solidFill>
-          </a:ln>
-          <a:effectLst/>
-        </p:spPr>
-        <p:style>
-          <a:lnRef idx="1">
-            <a:schemeClr val="accent1"/>
-          </a:lnRef>
-          <a:fillRef idx="3">
-            <a:schemeClr val="accent1"/>
-          </a:fillRef>
-          <a:effectRef idx="2">
-            <a:schemeClr val="accent1"/>
-          </a:effectRef>
-          <a:fontRef idx="minor">
-            <a:schemeClr val="lt1"/>
-          </a:fontRef>
-        </p:style>
-        <p:txBody>
-          <a:bodyPr rtlCol="0" anchor="ctr"/>
-          <a:lstStyle/>
-          <a:p/>
-        </p:txBody>
-      </p:sp>
-      <p:sp>
-        <p:nvSpPr>
-          <p:cNvPr id="29" name="Rounded Rectangle 28"/>
-          <p:cNvSpPr/>
-          <p:nvPr/>
-        </p:nvSpPr>
-        <p:spPr>
-          <a:xfrm>
-            <a:off x="841247" y="5675884"/>
-            <a:ext cx="365760" cy="365760"/>
-          </a:xfrm>
-          <a:prstGeom prst="roundRect">
-            <a:avLst>
-              <a:gd name="adj" fmla="val 32500"/>
-            </a:avLst>
-          </a:prstGeom>
-          <a:solidFill>
-            <a:srgbClr val="E7F0F6"/>
-          </a:solidFill>
-          <a:ln>
-            <a:noFill/>
-          </a:ln>
-          <a:effectLst/>
-        </p:spPr>
-        <p:style>
-          <a:lnRef idx="1">
-            <a:schemeClr val="accent1"/>
-          </a:lnRef>
-          <a:fillRef idx="3">
-            <a:schemeClr val="accent1"/>
-          </a:fillRef>
-          <a:effectRef idx="2">
-            <a:schemeClr val="accent1"/>
-          </a:effectRef>
-          <a:fontRef idx="minor">
-            <a:schemeClr val="lt1"/>
-          </a:fontRef>
-        </p:style>
-        <p:txBody>
-          <a:bodyPr rtlCol="0" anchor="ctr"/>
-          <a:lstStyle/>
-          <a:p/>
-        </p:txBody>
-      </p:sp>
-      <p:sp>
-        <p:nvSpPr>
-          <p:cNvPr id="30" name="TextBox 29"/>
-          <p:cNvSpPr txBox="1"/>
-          <p:nvPr/>
-        </p:nvSpPr>
-        <p:spPr>
-          <a:xfrm>
-            <a:off x="841247" y="5739892"/>
-            <a:ext cx="365760" cy="256032"/>
-          </a:xfrm>
-          <a:prstGeom prst="rect">
-            <a:avLst/>
-          </a:prstGeom>
-          <a:noFill/>
-        </p:spPr>
-        <p:txBody>
-          <a:bodyPr wrap="square" lIns="0" rIns="0" tIns="0" bIns="0" anchor="t">
-            <a:spAutoFit/>
-          </a:bodyPr>
-          <a:lstStyle/>
-          <a:p>
-            <a:pPr algn="ctr">
-              <a:lnSpc>
-                <a:spcPct val="135000"/>
-              </a:lnSpc>
-            </a:pPr>
-            <a:r>
-              <a:rPr sz="1500" b="1" i="0">
-                <a:solidFill>
-                  <a:srgbClr val="1D6B8F"/>
-                </a:solidFill>
-                <a:latin typeface="Verdana"/>
-              </a:rPr>
-              <a:t>6</a:t>
-            </a:r>
-          </a:p>
-        </p:txBody>
-      </p:sp>
-      <p:sp>
-        <p:nvSpPr>
-          <p:cNvPr id="31" name="TextBox 30"/>
-          <p:cNvSpPr txBox="1"/>
-          <p:nvPr/>
-        </p:nvSpPr>
-        <p:spPr>
-          <a:xfrm>
-            <a:off x="1344168" y="5734304"/>
-            <a:ext cx="10097719" cy="285496"/>
-          </a:xfrm>
-          <a:prstGeom prst="rect">
-            <a:avLst/>
-          </a:prstGeom>
-          <a:noFill/>
-        </p:spPr>
-        <p:txBody>
-          <a:bodyPr wrap="square" lIns="0" rIns="0" tIns="0" bIns="0" anchor="t">
-            <a:spAutoFit/>
-          </a:bodyPr>
-          <a:lstStyle/>
-          <a:p>
-            <a:pPr algn="l">
-              <a:lnSpc>
-                <a:spcPct val="140000"/>
-              </a:lnSpc>
-            </a:pPr>
-            <a:r>
-              <a:rPr sz="1400" b="0" i="0">
-                <a:solidFill>
-                  <a:srgbClr val="3A3D40"/>
-                </a:solidFill>
-                <a:latin typeface="Verdana"/>
-              </a:rPr>
-              <a:t>Qui tranche s'il y a désaccord sur le danger ?   </a:t>
-            </a:r>
-            <a:r>
-              <a:rPr sz="1400" b="1" i="0">
-                <a:solidFill>
-                  <a:srgbClr val="07734A"/>
-                </a:solidFill>
-                <a:latin typeface="Verdana"/>
-              </a:rPr>
-              <a:t>» l'inspecteur de la CNESST</a:t>
+              <a:t>En cas de désaccord, l'inspecteur de la CNESST détermine s'il existe ou non un danger justifiant le refus.</a:t>
             </a:r>
           </a:p>
         </p:txBody>
